--- a/jisho2.pptx
+++ b/jisho2.pptx
@@ -4,9 +4,17 @@
   <p:sldMasterIdLst>
     <p:sldMasterId id="2147483648" r:id="rId1"/>
   </p:sldMasterIdLst>
+  <p:notesMasterIdLst>
+    <p:notesMasterId r:id="rId9"/>
+  </p:notesMasterIdLst>
   <p:sldIdLst>
     <p:sldId id="256" r:id="rId2"/>
-    <p:sldId id="257" r:id="rId3"/>
+    <p:sldId id="262" r:id="rId3"/>
+    <p:sldId id="257" r:id="rId4"/>
+    <p:sldId id="258" r:id="rId5"/>
+    <p:sldId id="260" r:id="rId6"/>
+    <p:sldId id="261" r:id="rId7"/>
+    <p:sldId id="259" r:id="rId8"/>
   </p:sldIdLst>
   <p:sldSz cx="12192000" cy="6858000"/>
   <p:notesSz cx="6858000" cy="9144000"/>
@@ -105,7 +113,564 @@
       </a:defRPr>
     </a:lvl9pPr>
   </p:defaultTextStyle>
+  <p:extLst>
+    <p:ext uri="{EFAFB233-063F-42B5-8137-9DF3F51BA10A}">
+      <p15:sldGuideLst xmlns:p15="http://schemas.microsoft.com/office/powerpoint/2012/main"/>
+    </p:ext>
+  </p:extLst>
 </p:presentation>
+</file>
+
+<file path=ppt/notesMasters/notesMaster1.xml><?xml version="1.0" encoding="utf-8"?>
+<p:notesMaster xmlns:a="http://schemas.openxmlformats.org/drawingml/2006/main" xmlns:r="http://schemas.openxmlformats.org/officeDocument/2006/relationships" xmlns:p="http://schemas.openxmlformats.org/presentationml/2006/main">
+  <p:cSld>
+    <p:bg>
+      <p:bgRef idx="1001">
+        <a:schemeClr val="bg1"/>
+      </p:bgRef>
+    </p:bg>
+    <p:spTree>
+      <p:nvGrpSpPr>
+        <p:cNvPr id="1" name=""/>
+        <p:cNvGrpSpPr/>
+        <p:nvPr/>
+      </p:nvGrpSpPr>
+      <p:grpSpPr>
+        <a:xfrm>
+          <a:off x="0" y="0"/>
+          <a:ext cx="0" cy="0"/>
+          <a:chOff x="0" y="0"/>
+          <a:chExt cx="0" cy="0"/>
+        </a:xfrm>
+      </p:grpSpPr>
+      <p:sp>
+        <p:nvSpPr>
+          <p:cNvPr id="2" name="ヘッダー プレースホルダー 1"/>
+          <p:cNvSpPr>
+            <a:spLocks noGrp="1"/>
+          </p:cNvSpPr>
+          <p:nvPr>
+            <p:ph type="hdr" sz="quarter"/>
+          </p:nvPr>
+        </p:nvSpPr>
+        <p:spPr>
+          <a:xfrm>
+            <a:off x="0" y="0"/>
+            <a:ext cx="2971800" cy="458788"/>
+          </a:xfrm>
+          <a:prstGeom prst="rect">
+            <a:avLst/>
+          </a:prstGeom>
+        </p:spPr>
+        <p:txBody>
+          <a:bodyPr vert="horz" lIns="91440" tIns="45720" rIns="91440" bIns="45720" rtlCol="0"/>
+          <a:lstStyle>
+            <a:lvl1pPr algn="l">
+              <a:defRPr sz="1200"/>
+            </a:lvl1pPr>
+          </a:lstStyle>
+          <a:p>
+            <a:endParaRPr kumimoji="1" lang="ja-JP" altLang="en-US"/>
+          </a:p>
+        </p:txBody>
+      </p:sp>
+      <p:sp>
+        <p:nvSpPr>
+          <p:cNvPr id="3" name="日付プレースホルダー 2"/>
+          <p:cNvSpPr>
+            <a:spLocks noGrp="1"/>
+          </p:cNvSpPr>
+          <p:nvPr>
+            <p:ph type="dt" idx="1"/>
+          </p:nvPr>
+        </p:nvSpPr>
+        <p:spPr>
+          <a:xfrm>
+            <a:off x="3884613" y="0"/>
+            <a:ext cx="2971800" cy="458788"/>
+          </a:xfrm>
+          <a:prstGeom prst="rect">
+            <a:avLst/>
+          </a:prstGeom>
+        </p:spPr>
+        <p:txBody>
+          <a:bodyPr vert="horz" lIns="91440" tIns="45720" rIns="91440" bIns="45720" rtlCol="0"/>
+          <a:lstStyle>
+            <a:lvl1pPr algn="r">
+              <a:defRPr sz="1200"/>
+            </a:lvl1pPr>
+          </a:lstStyle>
+          <a:p>
+            <a:fld id="{B560E4D0-CCB1-4F58-9656-EA4A1A9FED8E}" type="datetimeFigureOut">
+              <a:rPr kumimoji="1" lang="ja-JP" altLang="en-US" smtClean="0"/>
+              <a:t>2026/2/27</a:t>
+            </a:fld>
+            <a:endParaRPr kumimoji="1" lang="ja-JP" altLang="en-US"/>
+          </a:p>
+        </p:txBody>
+      </p:sp>
+      <p:sp>
+        <p:nvSpPr>
+          <p:cNvPr id="4" name="スライド イメージ プレースホルダー 3"/>
+          <p:cNvSpPr>
+            <a:spLocks noGrp="1" noRot="1" noChangeAspect="1"/>
+          </p:cNvSpPr>
+          <p:nvPr>
+            <p:ph type="sldImg" idx="2"/>
+          </p:nvPr>
+        </p:nvSpPr>
+        <p:spPr>
+          <a:xfrm>
+            <a:off x="685800" y="1143000"/>
+            <a:ext cx="5486400" cy="3086100"/>
+          </a:xfrm>
+          <a:prstGeom prst="rect">
+            <a:avLst/>
+          </a:prstGeom>
+          <a:noFill/>
+          <a:ln w="12700">
+            <a:solidFill>
+              <a:prstClr val="black"/>
+            </a:solidFill>
+          </a:ln>
+        </p:spPr>
+        <p:txBody>
+          <a:bodyPr vert="horz" lIns="91440" tIns="45720" rIns="91440" bIns="45720" rtlCol="0" anchor="ctr"/>
+          <a:lstStyle/>
+          <a:p>
+            <a:endParaRPr lang="ja-JP" altLang="en-US"/>
+          </a:p>
+        </p:txBody>
+      </p:sp>
+      <p:sp>
+        <p:nvSpPr>
+          <p:cNvPr id="5" name="ノート プレースホルダー 4"/>
+          <p:cNvSpPr>
+            <a:spLocks noGrp="1"/>
+          </p:cNvSpPr>
+          <p:nvPr>
+            <p:ph type="body" sz="quarter" idx="3"/>
+          </p:nvPr>
+        </p:nvSpPr>
+        <p:spPr>
+          <a:xfrm>
+            <a:off x="685800" y="4400550"/>
+            <a:ext cx="5486400" cy="3600450"/>
+          </a:xfrm>
+          <a:prstGeom prst="rect">
+            <a:avLst/>
+          </a:prstGeom>
+        </p:spPr>
+        <p:txBody>
+          <a:bodyPr vert="horz" lIns="91440" tIns="45720" rIns="91440" bIns="45720" rtlCol="0"/>
+          <a:lstStyle/>
+          <a:p>
+            <a:pPr lvl="0"/>
+            <a:r>
+              <a:rPr kumimoji="1" lang="ja-JP" altLang="en-US"/>
+              <a:t>マスター テキストの書式設定</a:t>
+            </a:r>
+          </a:p>
+          <a:p>
+            <a:pPr lvl="1"/>
+            <a:r>
+              <a:rPr kumimoji="1" lang="ja-JP" altLang="en-US"/>
+              <a:t>第 </a:t>
+            </a:r>
+            <a:r>
+              <a:rPr kumimoji="1" lang="en-US" altLang="ja-JP"/>
+              <a:t>2 </a:t>
+            </a:r>
+            <a:r>
+              <a:rPr kumimoji="1" lang="ja-JP" altLang="en-US"/>
+              <a:t>レベル</a:t>
+            </a:r>
+          </a:p>
+          <a:p>
+            <a:pPr lvl="2"/>
+            <a:r>
+              <a:rPr kumimoji="1" lang="ja-JP" altLang="en-US"/>
+              <a:t>第 </a:t>
+            </a:r>
+            <a:r>
+              <a:rPr kumimoji="1" lang="en-US" altLang="ja-JP"/>
+              <a:t>3 </a:t>
+            </a:r>
+            <a:r>
+              <a:rPr kumimoji="1" lang="ja-JP" altLang="en-US"/>
+              <a:t>レベル</a:t>
+            </a:r>
+          </a:p>
+          <a:p>
+            <a:pPr lvl="3"/>
+            <a:r>
+              <a:rPr kumimoji="1" lang="ja-JP" altLang="en-US"/>
+              <a:t>第 </a:t>
+            </a:r>
+            <a:r>
+              <a:rPr kumimoji="1" lang="en-US" altLang="ja-JP"/>
+              <a:t>4 </a:t>
+            </a:r>
+            <a:r>
+              <a:rPr kumimoji="1" lang="ja-JP" altLang="en-US"/>
+              <a:t>レベル</a:t>
+            </a:r>
+          </a:p>
+          <a:p>
+            <a:pPr lvl="4"/>
+            <a:r>
+              <a:rPr kumimoji="1" lang="ja-JP" altLang="en-US"/>
+              <a:t>第 </a:t>
+            </a:r>
+            <a:r>
+              <a:rPr kumimoji="1" lang="en-US" altLang="ja-JP"/>
+              <a:t>5 </a:t>
+            </a:r>
+            <a:r>
+              <a:rPr kumimoji="1" lang="ja-JP" altLang="en-US"/>
+              <a:t>レベル</a:t>
+            </a:r>
+          </a:p>
+        </p:txBody>
+      </p:sp>
+      <p:sp>
+        <p:nvSpPr>
+          <p:cNvPr id="6" name="フッター プレースホルダー 5"/>
+          <p:cNvSpPr>
+            <a:spLocks noGrp="1"/>
+          </p:cNvSpPr>
+          <p:nvPr>
+            <p:ph type="ftr" sz="quarter" idx="4"/>
+          </p:nvPr>
+        </p:nvSpPr>
+        <p:spPr>
+          <a:xfrm>
+            <a:off x="0" y="8685213"/>
+            <a:ext cx="2971800" cy="458787"/>
+          </a:xfrm>
+          <a:prstGeom prst="rect">
+            <a:avLst/>
+          </a:prstGeom>
+        </p:spPr>
+        <p:txBody>
+          <a:bodyPr vert="horz" lIns="91440" tIns="45720" rIns="91440" bIns="45720" rtlCol="0" anchor="b"/>
+          <a:lstStyle>
+            <a:lvl1pPr algn="l">
+              <a:defRPr sz="1200"/>
+            </a:lvl1pPr>
+          </a:lstStyle>
+          <a:p>
+            <a:endParaRPr kumimoji="1" lang="ja-JP" altLang="en-US"/>
+          </a:p>
+        </p:txBody>
+      </p:sp>
+      <p:sp>
+        <p:nvSpPr>
+          <p:cNvPr id="7" name="スライド番号プレースホルダー 6"/>
+          <p:cNvSpPr>
+            <a:spLocks noGrp="1"/>
+          </p:cNvSpPr>
+          <p:nvPr>
+            <p:ph type="sldNum" sz="quarter" idx="5"/>
+          </p:nvPr>
+        </p:nvSpPr>
+        <p:spPr>
+          <a:xfrm>
+            <a:off x="3884613" y="8685213"/>
+            <a:ext cx="2971800" cy="458787"/>
+          </a:xfrm>
+          <a:prstGeom prst="rect">
+            <a:avLst/>
+          </a:prstGeom>
+        </p:spPr>
+        <p:txBody>
+          <a:bodyPr vert="horz" lIns="91440" tIns="45720" rIns="91440" bIns="45720" rtlCol="0" anchor="b"/>
+          <a:lstStyle>
+            <a:lvl1pPr algn="r">
+              <a:defRPr sz="1200"/>
+            </a:lvl1pPr>
+          </a:lstStyle>
+          <a:p>
+            <a:fld id="{E07A6791-249D-49F5-B943-7EAD06310514}" type="slidenum">
+              <a:rPr kumimoji="1" lang="ja-JP" altLang="en-US" smtClean="0"/>
+              <a:t>‹#›</a:t>
+            </a:fld>
+            <a:endParaRPr kumimoji="1" lang="ja-JP" altLang="en-US"/>
+          </a:p>
+        </p:txBody>
+      </p:sp>
+    </p:spTree>
+    <p:extLst>
+      <p:ext uri="{BB962C8B-B14F-4D97-AF65-F5344CB8AC3E}">
+        <p14:creationId xmlns:p14="http://schemas.microsoft.com/office/powerpoint/2010/main" val="184134027"/>
+      </p:ext>
+    </p:extLst>
+  </p:cSld>
+  <p:clrMap bg1="lt1" tx1="dk1" bg2="lt2" tx2="dk2" accent1="accent1" accent2="accent2" accent3="accent3" accent4="accent4" accent5="accent5" accent6="accent6" hlink="hlink" folHlink="folHlink"/>
+  <p:notesStyle>
+    <a:lvl1pPr marL="0" algn="l" defTabSz="914400" rtl="0" eaLnBrk="1" latinLnBrk="0" hangingPunct="1">
+      <a:defRPr kumimoji="1" sz="1200" kern="1200">
+        <a:solidFill>
+          <a:schemeClr val="tx1"/>
+        </a:solidFill>
+        <a:latin typeface="+mn-lt"/>
+        <a:ea typeface="+mn-ea"/>
+        <a:cs typeface="+mn-cs"/>
+      </a:defRPr>
+    </a:lvl1pPr>
+    <a:lvl2pPr marL="457200" algn="l" defTabSz="914400" rtl="0" eaLnBrk="1" latinLnBrk="0" hangingPunct="1">
+      <a:defRPr kumimoji="1" sz="1200" kern="1200">
+        <a:solidFill>
+          <a:schemeClr val="tx1"/>
+        </a:solidFill>
+        <a:latin typeface="+mn-lt"/>
+        <a:ea typeface="+mn-ea"/>
+        <a:cs typeface="+mn-cs"/>
+      </a:defRPr>
+    </a:lvl2pPr>
+    <a:lvl3pPr marL="914400" algn="l" defTabSz="914400" rtl="0" eaLnBrk="1" latinLnBrk="0" hangingPunct="1">
+      <a:defRPr kumimoji="1" sz="1200" kern="1200">
+        <a:solidFill>
+          <a:schemeClr val="tx1"/>
+        </a:solidFill>
+        <a:latin typeface="+mn-lt"/>
+        <a:ea typeface="+mn-ea"/>
+        <a:cs typeface="+mn-cs"/>
+      </a:defRPr>
+    </a:lvl3pPr>
+    <a:lvl4pPr marL="1371600" algn="l" defTabSz="914400" rtl="0" eaLnBrk="1" latinLnBrk="0" hangingPunct="1">
+      <a:defRPr kumimoji="1" sz="1200" kern="1200">
+        <a:solidFill>
+          <a:schemeClr val="tx1"/>
+        </a:solidFill>
+        <a:latin typeface="+mn-lt"/>
+        <a:ea typeface="+mn-ea"/>
+        <a:cs typeface="+mn-cs"/>
+      </a:defRPr>
+    </a:lvl4pPr>
+    <a:lvl5pPr marL="1828800" algn="l" defTabSz="914400" rtl="0" eaLnBrk="1" latinLnBrk="0" hangingPunct="1">
+      <a:defRPr kumimoji="1" sz="1200" kern="1200">
+        <a:solidFill>
+          <a:schemeClr val="tx1"/>
+        </a:solidFill>
+        <a:latin typeface="+mn-lt"/>
+        <a:ea typeface="+mn-ea"/>
+        <a:cs typeface="+mn-cs"/>
+      </a:defRPr>
+    </a:lvl5pPr>
+    <a:lvl6pPr marL="2286000" algn="l" defTabSz="914400" rtl="0" eaLnBrk="1" latinLnBrk="0" hangingPunct="1">
+      <a:defRPr kumimoji="1" sz="1200" kern="1200">
+        <a:solidFill>
+          <a:schemeClr val="tx1"/>
+        </a:solidFill>
+        <a:latin typeface="+mn-lt"/>
+        <a:ea typeface="+mn-ea"/>
+        <a:cs typeface="+mn-cs"/>
+      </a:defRPr>
+    </a:lvl6pPr>
+    <a:lvl7pPr marL="2743200" algn="l" defTabSz="914400" rtl="0" eaLnBrk="1" latinLnBrk="0" hangingPunct="1">
+      <a:defRPr kumimoji="1" sz="1200" kern="1200">
+        <a:solidFill>
+          <a:schemeClr val="tx1"/>
+        </a:solidFill>
+        <a:latin typeface="+mn-lt"/>
+        <a:ea typeface="+mn-ea"/>
+        <a:cs typeface="+mn-cs"/>
+      </a:defRPr>
+    </a:lvl7pPr>
+    <a:lvl8pPr marL="3200400" algn="l" defTabSz="914400" rtl="0" eaLnBrk="1" latinLnBrk="0" hangingPunct="1">
+      <a:defRPr kumimoji="1" sz="1200" kern="1200">
+        <a:solidFill>
+          <a:schemeClr val="tx1"/>
+        </a:solidFill>
+        <a:latin typeface="+mn-lt"/>
+        <a:ea typeface="+mn-ea"/>
+        <a:cs typeface="+mn-cs"/>
+      </a:defRPr>
+    </a:lvl8pPr>
+    <a:lvl9pPr marL="3657600" algn="l" defTabSz="914400" rtl="0" eaLnBrk="1" latinLnBrk="0" hangingPunct="1">
+      <a:defRPr kumimoji="1" sz="1200" kern="1200">
+        <a:solidFill>
+          <a:schemeClr val="tx1"/>
+        </a:solidFill>
+        <a:latin typeface="+mn-lt"/>
+        <a:ea typeface="+mn-ea"/>
+        <a:cs typeface="+mn-cs"/>
+      </a:defRPr>
+    </a:lvl9pPr>
+  </p:notesStyle>
+</p:notesMaster>
+</file>
+
+<file path=ppt/notesSlides/notesSlide1.xml><?xml version="1.0" encoding="utf-8"?>
+<p:notes xmlns:a="http://schemas.openxmlformats.org/drawingml/2006/main" xmlns:r="http://schemas.openxmlformats.org/officeDocument/2006/relationships" xmlns:p="http://schemas.openxmlformats.org/presentationml/2006/main">
+  <p:cSld>
+    <p:spTree>
+      <p:nvGrpSpPr>
+        <p:cNvPr id="1" name=""/>
+        <p:cNvGrpSpPr/>
+        <p:nvPr/>
+      </p:nvGrpSpPr>
+      <p:grpSpPr>
+        <a:xfrm>
+          <a:off x="0" y="0"/>
+          <a:ext cx="0" cy="0"/>
+          <a:chOff x="0" y="0"/>
+          <a:chExt cx="0" cy="0"/>
+        </a:xfrm>
+      </p:grpSpPr>
+      <p:sp>
+        <p:nvSpPr>
+          <p:cNvPr id="2" name="スライド イメージ プレースホルダー 1"/>
+          <p:cNvSpPr>
+            <a:spLocks noGrp="1" noRot="1" noChangeAspect="1"/>
+          </p:cNvSpPr>
+          <p:nvPr>
+            <p:ph type="sldImg"/>
+          </p:nvPr>
+        </p:nvSpPr>
+        <p:spPr/>
+      </p:sp>
+      <p:sp>
+        <p:nvSpPr>
+          <p:cNvPr id="3" name="ノート プレースホルダー 2"/>
+          <p:cNvSpPr>
+            <a:spLocks noGrp="1"/>
+          </p:cNvSpPr>
+          <p:nvPr>
+            <p:ph type="body" idx="1"/>
+          </p:nvPr>
+        </p:nvSpPr>
+        <p:spPr/>
+        <p:txBody>
+          <a:bodyPr/>
+          <a:lstStyle/>
+          <a:p>
+            <a:endParaRPr kumimoji="1" lang="ja-JP" altLang="en-US" dirty="0"/>
+          </a:p>
+        </p:txBody>
+      </p:sp>
+      <p:sp>
+        <p:nvSpPr>
+          <p:cNvPr id="4" name="スライド番号プレースホルダー 3"/>
+          <p:cNvSpPr>
+            <a:spLocks noGrp="1"/>
+          </p:cNvSpPr>
+          <p:nvPr>
+            <p:ph type="sldNum" sz="quarter" idx="5"/>
+          </p:nvPr>
+        </p:nvSpPr>
+        <p:spPr/>
+        <p:txBody>
+          <a:bodyPr/>
+          <a:lstStyle/>
+          <a:p>
+            <a:fld id="{E07A6791-249D-49F5-B943-7EAD06310514}" type="slidenum">
+              <a:rPr kumimoji="1" lang="ja-JP" altLang="en-US" smtClean="0"/>
+              <a:t>2</a:t>
+            </a:fld>
+            <a:endParaRPr kumimoji="1" lang="ja-JP" altLang="en-US"/>
+          </a:p>
+        </p:txBody>
+      </p:sp>
+    </p:spTree>
+    <p:extLst>
+      <p:ext uri="{BB962C8B-B14F-4D97-AF65-F5344CB8AC3E}">
+        <p14:creationId xmlns:p14="http://schemas.microsoft.com/office/powerpoint/2010/main" val="737820567"/>
+      </p:ext>
+    </p:extLst>
+  </p:cSld>
+  <p:clrMapOvr>
+    <a:masterClrMapping/>
+  </p:clrMapOvr>
+</p:notes>
+</file>
+
+<file path=ppt/notesSlides/notesSlide2.xml><?xml version="1.0" encoding="utf-8"?>
+<p:notes xmlns:a="http://schemas.openxmlformats.org/drawingml/2006/main" xmlns:r="http://schemas.openxmlformats.org/officeDocument/2006/relationships" xmlns:p="http://schemas.openxmlformats.org/presentationml/2006/main">
+  <p:cSld>
+    <p:spTree>
+      <p:nvGrpSpPr>
+        <p:cNvPr id="1" name=""/>
+        <p:cNvGrpSpPr/>
+        <p:nvPr/>
+      </p:nvGrpSpPr>
+      <p:grpSpPr>
+        <a:xfrm>
+          <a:off x="0" y="0"/>
+          <a:ext cx="0" cy="0"/>
+          <a:chOff x="0" y="0"/>
+          <a:chExt cx="0" cy="0"/>
+        </a:xfrm>
+      </p:grpSpPr>
+      <p:sp>
+        <p:nvSpPr>
+          <p:cNvPr id="2" name="スライド イメージ プレースホルダー 1"/>
+          <p:cNvSpPr>
+            <a:spLocks noGrp="1" noRot="1" noChangeAspect="1"/>
+          </p:cNvSpPr>
+          <p:nvPr>
+            <p:ph type="sldImg"/>
+          </p:nvPr>
+        </p:nvSpPr>
+        <p:spPr/>
+      </p:sp>
+      <p:sp>
+        <p:nvSpPr>
+          <p:cNvPr id="3" name="ノート プレースホルダー 2"/>
+          <p:cNvSpPr>
+            <a:spLocks noGrp="1"/>
+          </p:cNvSpPr>
+          <p:nvPr>
+            <p:ph type="body" idx="1"/>
+          </p:nvPr>
+        </p:nvSpPr>
+        <p:spPr/>
+        <p:txBody>
+          <a:bodyPr/>
+          <a:lstStyle/>
+          <a:p>
+            <a:r>
+              <a:rPr kumimoji="1" lang="ja-JP" altLang="en-US" dirty="0"/>
+              <a:t>クイズ用のロゴ</a:t>
+            </a:r>
+          </a:p>
+        </p:txBody>
+      </p:sp>
+      <p:sp>
+        <p:nvSpPr>
+          <p:cNvPr id="4" name="スライド番号プレースホルダー 3"/>
+          <p:cNvSpPr>
+            <a:spLocks noGrp="1"/>
+          </p:cNvSpPr>
+          <p:nvPr>
+            <p:ph type="sldNum" sz="quarter" idx="5"/>
+          </p:nvPr>
+        </p:nvSpPr>
+        <p:spPr/>
+        <p:txBody>
+          <a:bodyPr/>
+          <a:lstStyle/>
+          <a:p>
+            <a:fld id="{E07A6791-249D-49F5-B943-7EAD06310514}" type="slidenum">
+              <a:rPr kumimoji="1" lang="ja-JP" altLang="en-US" smtClean="0"/>
+              <a:t>4</a:t>
+            </a:fld>
+            <a:endParaRPr kumimoji="1" lang="ja-JP" altLang="en-US"/>
+          </a:p>
+        </p:txBody>
+      </p:sp>
+    </p:spTree>
+    <p:extLst>
+      <p:ext uri="{BB962C8B-B14F-4D97-AF65-F5344CB8AC3E}">
+        <p14:creationId xmlns:p14="http://schemas.microsoft.com/office/powerpoint/2010/main" val="2949855052"/>
+      </p:ext>
+    </p:extLst>
+  </p:cSld>
+  <p:clrMapOvr>
+    <a:masterClrMapping/>
+  </p:clrMapOvr>
+</p:notes>
 </file>
 
 <file path=ppt/slideLayouts/slideLayout1.xml><?xml version="1.0" encoding="utf-8"?>
@@ -255,7 +820,7 @@
           <a:p>
             <a:fld id="{028E0C45-3984-47D8-90C8-E13972601C71}" type="datetimeFigureOut">
               <a:rPr kumimoji="1" lang="ja-JP" altLang="en-US" smtClean="0"/>
-              <a:t>2025/12/18</a:t>
+              <a:t>2026/2/27</a:t>
             </a:fld>
             <a:endParaRPr kumimoji="1" lang="ja-JP" altLang="en-US"/>
           </a:p>
@@ -485,7 +1050,7 @@
           <a:p>
             <a:fld id="{028E0C45-3984-47D8-90C8-E13972601C71}" type="datetimeFigureOut">
               <a:rPr kumimoji="1" lang="ja-JP" altLang="en-US" smtClean="0"/>
-              <a:t>2025/12/18</a:t>
+              <a:t>2026/2/27</a:t>
             </a:fld>
             <a:endParaRPr kumimoji="1" lang="ja-JP" altLang="en-US"/>
           </a:p>
@@ -725,7 +1290,7 @@
           <a:p>
             <a:fld id="{028E0C45-3984-47D8-90C8-E13972601C71}" type="datetimeFigureOut">
               <a:rPr kumimoji="1" lang="ja-JP" altLang="en-US" smtClean="0"/>
-              <a:t>2025/12/18</a:t>
+              <a:t>2026/2/27</a:t>
             </a:fld>
             <a:endParaRPr kumimoji="1" lang="ja-JP" altLang="en-US"/>
           </a:p>
@@ -955,7 +1520,7 @@
           <a:p>
             <a:fld id="{028E0C45-3984-47D8-90C8-E13972601C71}" type="datetimeFigureOut">
               <a:rPr kumimoji="1" lang="ja-JP" altLang="en-US" smtClean="0"/>
-              <a:t>2025/12/18</a:t>
+              <a:t>2026/2/27</a:t>
             </a:fld>
             <a:endParaRPr kumimoji="1" lang="ja-JP" altLang="en-US"/>
           </a:p>
@@ -1230,7 +1795,7 @@
           <a:p>
             <a:fld id="{028E0C45-3984-47D8-90C8-E13972601C71}" type="datetimeFigureOut">
               <a:rPr kumimoji="1" lang="ja-JP" altLang="en-US" smtClean="0"/>
-              <a:t>2025/12/18</a:t>
+              <a:t>2026/2/27</a:t>
             </a:fld>
             <a:endParaRPr kumimoji="1" lang="ja-JP" altLang="en-US"/>
           </a:p>
@@ -1559,7 +2124,7 @@
           <a:p>
             <a:fld id="{028E0C45-3984-47D8-90C8-E13972601C71}" type="datetimeFigureOut">
               <a:rPr kumimoji="1" lang="ja-JP" altLang="en-US" smtClean="0"/>
-              <a:t>2025/12/18</a:t>
+              <a:t>2026/2/27</a:t>
             </a:fld>
             <a:endParaRPr kumimoji="1" lang="ja-JP" altLang="en-US"/>
           </a:p>
@@ -2035,7 +2600,7 @@
           <a:p>
             <a:fld id="{028E0C45-3984-47D8-90C8-E13972601C71}" type="datetimeFigureOut">
               <a:rPr kumimoji="1" lang="ja-JP" altLang="en-US" smtClean="0"/>
-              <a:t>2025/12/18</a:t>
+              <a:t>2026/2/27</a:t>
             </a:fld>
             <a:endParaRPr kumimoji="1" lang="ja-JP" altLang="en-US"/>
           </a:p>
@@ -2176,7 +2741,7 @@
           <a:p>
             <a:fld id="{028E0C45-3984-47D8-90C8-E13972601C71}" type="datetimeFigureOut">
               <a:rPr kumimoji="1" lang="ja-JP" altLang="en-US" smtClean="0"/>
-              <a:t>2025/12/18</a:t>
+              <a:t>2026/2/27</a:t>
             </a:fld>
             <a:endParaRPr kumimoji="1" lang="ja-JP" altLang="en-US"/>
           </a:p>
@@ -2289,7 +2854,7 @@
           <a:p>
             <a:fld id="{028E0C45-3984-47D8-90C8-E13972601C71}" type="datetimeFigureOut">
               <a:rPr kumimoji="1" lang="ja-JP" altLang="en-US" smtClean="0"/>
-              <a:t>2025/12/18</a:t>
+              <a:t>2026/2/27</a:t>
             </a:fld>
             <a:endParaRPr kumimoji="1" lang="ja-JP" altLang="en-US"/>
           </a:p>
@@ -2632,7 +3197,7 @@
           <a:p>
             <a:fld id="{028E0C45-3984-47D8-90C8-E13972601C71}" type="datetimeFigureOut">
               <a:rPr kumimoji="1" lang="ja-JP" altLang="en-US" smtClean="0"/>
-              <a:t>2025/12/18</a:t>
+              <a:t>2026/2/27</a:t>
             </a:fld>
             <a:endParaRPr kumimoji="1" lang="ja-JP" altLang="en-US"/>
           </a:p>
@@ -2920,7 +3485,7 @@
           <a:p>
             <a:fld id="{028E0C45-3984-47D8-90C8-E13972601C71}" type="datetimeFigureOut">
               <a:rPr kumimoji="1" lang="ja-JP" altLang="en-US" smtClean="0"/>
-              <a:t>2025/12/18</a:t>
+              <a:t>2026/2/27</a:t>
             </a:fld>
             <a:endParaRPr kumimoji="1" lang="ja-JP" altLang="en-US"/>
           </a:p>
@@ -3193,7 +3758,7 @@
           <a:p>
             <a:fld id="{028E0C45-3984-47D8-90C8-E13972601C71}" type="datetimeFigureOut">
               <a:rPr kumimoji="1" lang="ja-JP" altLang="en-US" smtClean="0"/>
-              <a:t>2025/12/18</a:t>
+              <a:t>2026/2/27</a:t>
             </a:fld>
             <a:endParaRPr kumimoji="1" lang="ja-JP" altLang="en-US"/>
           </a:p>
@@ -3810,6 +4375,1380 @@
     <p:bg>
       <p:bgPr>
         <a:solidFill>
+          <a:srgbClr val="59C294"/>
+        </a:solidFill>
+        <a:effectLst/>
+      </p:bgPr>
+    </p:bg>
+    <p:spTree>
+      <p:nvGrpSpPr>
+        <p:cNvPr id="1" name=""/>
+        <p:cNvGrpSpPr/>
+        <p:nvPr/>
+      </p:nvGrpSpPr>
+      <p:grpSpPr>
+        <a:xfrm>
+          <a:off x="0" y="0"/>
+          <a:ext cx="0" cy="0"/>
+          <a:chOff x="0" y="0"/>
+          <a:chExt cx="0" cy="0"/>
+        </a:xfrm>
+      </p:grpSpPr>
+      <p:sp>
+        <p:nvSpPr>
+          <p:cNvPr id="36" name="四角形: 角を丸くする 35">
+            <a:extLst>
+              <a:ext uri="{FF2B5EF4-FFF2-40B4-BE49-F238E27FC236}">
+                <a16:creationId xmlns:a16="http://schemas.microsoft.com/office/drawing/2014/main" id="{1209479E-CB11-6E84-2277-2F66E295F4D4}"/>
+              </a:ext>
+            </a:extLst>
+          </p:cNvPr>
+          <p:cNvSpPr/>
+          <p:nvPr/>
+        </p:nvSpPr>
+        <p:spPr>
+          <a:xfrm>
+            <a:off x="749797" y="4907078"/>
+            <a:ext cx="9054206" cy="1141527"/>
+          </a:xfrm>
+          <a:prstGeom prst="roundRect">
+            <a:avLst/>
+          </a:prstGeom>
+          <a:solidFill>
+            <a:schemeClr val="tx1"/>
+          </a:solidFill>
+          <a:ln w="38100">
+            <a:solidFill>
+              <a:schemeClr val="tx1"/>
+            </a:solidFill>
+          </a:ln>
+        </p:spPr>
+        <p:style>
+          <a:lnRef idx="2">
+            <a:schemeClr val="accent1">
+              <a:shade val="15000"/>
+            </a:schemeClr>
+          </a:lnRef>
+          <a:fillRef idx="1">
+            <a:schemeClr val="accent1"/>
+          </a:fillRef>
+          <a:effectRef idx="0">
+            <a:schemeClr val="accent1"/>
+          </a:effectRef>
+          <a:fontRef idx="minor">
+            <a:schemeClr val="lt1"/>
+          </a:fontRef>
+        </p:style>
+        <p:txBody>
+          <a:bodyPr rtlCol="0" anchor="ctr"/>
+          <a:lstStyle/>
+          <a:p>
+            <a:pPr algn="ctr"/>
+            <a:endParaRPr kumimoji="1" lang="ja-JP" altLang="en-US"/>
+          </a:p>
+        </p:txBody>
+      </p:sp>
+      <p:sp>
+        <p:nvSpPr>
+          <p:cNvPr id="35" name="四角形: 角を丸くする 34">
+            <a:extLst>
+              <a:ext uri="{FF2B5EF4-FFF2-40B4-BE49-F238E27FC236}">
+                <a16:creationId xmlns:a16="http://schemas.microsoft.com/office/drawing/2014/main" id="{80F54776-4EA3-7672-4D9A-D05398478A4E}"/>
+              </a:ext>
+            </a:extLst>
+          </p:cNvPr>
+          <p:cNvSpPr/>
+          <p:nvPr/>
+        </p:nvSpPr>
+        <p:spPr>
+          <a:xfrm>
+            <a:off x="7275348" y="756261"/>
+            <a:ext cx="2474510" cy="3883525"/>
+          </a:xfrm>
+          <a:prstGeom prst="roundRect">
+            <a:avLst>
+              <a:gd name="adj" fmla="val 7881"/>
+            </a:avLst>
+          </a:prstGeom>
+          <a:solidFill>
+            <a:schemeClr val="tx1"/>
+          </a:solidFill>
+          <a:ln w="38100">
+            <a:solidFill>
+              <a:schemeClr val="tx1"/>
+            </a:solidFill>
+          </a:ln>
+        </p:spPr>
+        <p:style>
+          <a:lnRef idx="2">
+            <a:schemeClr val="accent1">
+              <a:shade val="15000"/>
+            </a:schemeClr>
+          </a:lnRef>
+          <a:fillRef idx="1">
+            <a:schemeClr val="accent1"/>
+          </a:fillRef>
+          <a:effectRef idx="0">
+            <a:schemeClr val="accent1"/>
+          </a:effectRef>
+          <a:fontRef idx="minor">
+            <a:schemeClr val="lt1"/>
+          </a:fontRef>
+        </p:style>
+        <p:txBody>
+          <a:bodyPr rtlCol="0" anchor="ctr"/>
+          <a:lstStyle/>
+          <a:p>
+            <a:pPr algn="ctr"/>
+            <a:endParaRPr kumimoji="1" lang="ja-JP" altLang="en-US"/>
+          </a:p>
+        </p:txBody>
+      </p:sp>
+      <p:sp>
+        <p:nvSpPr>
+          <p:cNvPr id="34" name="四角形: 角を丸くする 33">
+            <a:extLst>
+              <a:ext uri="{FF2B5EF4-FFF2-40B4-BE49-F238E27FC236}">
+                <a16:creationId xmlns:a16="http://schemas.microsoft.com/office/drawing/2014/main" id="{90C750E9-13CB-9124-8A13-276DA987E900}"/>
+              </a:ext>
+            </a:extLst>
+          </p:cNvPr>
+          <p:cNvSpPr/>
+          <p:nvPr/>
+        </p:nvSpPr>
+        <p:spPr>
+          <a:xfrm>
+            <a:off x="708319" y="776943"/>
+            <a:ext cx="6333955" cy="3883524"/>
+          </a:xfrm>
+          <a:prstGeom prst="roundRect">
+            <a:avLst>
+              <a:gd name="adj" fmla="val 6183"/>
+            </a:avLst>
+          </a:prstGeom>
+          <a:solidFill>
+            <a:schemeClr val="tx1"/>
+          </a:solidFill>
+          <a:ln w="38100">
+            <a:solidFill>
+              <a:schemeClr val="tx1"/>
+            </a:solidFill>
+          </a:ln>
+        </p:spPr>
+        <p:style>
+          <a:lnRef idx="2">
+            <a:schemeClr val="accent1">
+              <a:shade val="15000"/>
+            </a:schemeClr>
+          </a:lnRef>
+          <a:fillRef idx="1">
+            <a:schemeClr val="accent1"/>
+          </a:fillRef>
+          <a:effectRef idx="0">
+            <a:schemeClr val="accent1"/>
+          </a:effectRef>
+          <a:fontRef idx="minor">
+            <a:schemeClr val="lt1"/>
+          </a:fontRef>
+        </p:style>
+        <p:txBody>
+          <a:bodyPr rtlCol="0" anchor="ctr"/>
+          <a:lstStyle/>
+          <a:p>
+            <a:pPr algn="ctr"/>
+            <a:endParaRPr kumimoji="1" lang="ja-JP" altLang="en-US"/>
+          </a:p>
+        </p:txBody>
+      </p:sp>
+      <p:sp>
+        <p:nvSpPr>
+          <p:cNvPr id="6" name="四角形: 角を丸くする 5">
+            <a:extLst>
+              <a:ext uri="{FF2B5EF4-FFF2-40B4-BE49-F238E27FC236}">
+                <a16:creationId xmlns:a16="http://schemas.microsoft.com/office/drawing/2014/main" id="{A6D9159D-1527-4DDC-8E29-AA5F250AFC6A}"/>
+              </a:ext>
+            </a:extLst>
+          </p:cNvPr>
+          <p:cNvSpPr/>
+          <p:nvPr/>
+        </p:nvSpPr>
+        <p:spPr>
+          <a:xfrm>
+            <a:off x="629807" y="4814360"/>
+            <a:ext cx="9054206" cy="1141527"/>
+          </a:xfrm>
+          <a:prstGeom prst="roundRect">
+            <a:avLst/>
+          </a:prstGeom>
+          <a:solidFill>
+            <a:schemeClr val="bg2"/>
+          </a:solidFill>
+          <a:ln w="38100">
+            <a:solidFill>
+              <a:schemeClr val="tx1"/>
+            </a:solidFill>
+          </a:ln>
+        </p:spPr>
+        <p:style>
+          <a:lnRef idx="2">
+            <a:schemeClr val="accent1">
+              <a:shade val="15000"/>
+            </a:schemeClr>
+          </a:lnRef>
+          <a:fillRef idx="1">
+            <a:schemeClr val="accent1"/>
+          </a:fillRef>
+          <a:effectRef idx="0">
+            <a:schemeClr val="accent1"/>
+          </a:effectRef>
+          <a:fontRef idx="minor">
+            <a:schemeClr val="lt1"/>
+          </a:fontRef>
+        </p:style>
+        <p:txBody>
+          <a:bodyPr rtlCol="0" anchor="ctr"/>
+          <a:lstStyle/>
+          <a:p>
+            <a:pPr algn="ctr"/>
+            <a:endParaRPr kumimoji="1" lang="ja-JP" altLang="en-US"/>
+          </a:p>
+        </p:txBody>
+      </p:sp>
+      <p:sp>
+        <p:nvSpPr>
+          <p:cNvPr id="4" name="四角形: 角を丸くする 3">
+            <a:extLst>
+              <a:ext uri="{FF2B5EF4-FFF2-40B4-BE49-F238E27FC236}">
+                <a16:creationId xmlns:a16="http://schemas.microsoft.com/office/drawing/2014/main" id="{FE71FDA1-E8D2-5D5A-0113-4E11DEAFC9D9}"/>
+              </a:ext>
+            </a:extLst>
+          </p:cNvPr>
+          <p:cNvSpPr/>
+          <p:nvPr/>
+        </p:nvSpPr>
+        <p:spPr>
+          <a:xfrm>
+            <a:off x="629807" y="707667"/>
+            <a:ext cx="6333955" cy="3883524"/>
+          </a:xfrm>
+          <a:prstGeom prst="roundRect">
+            <a:avLst>
+              <a:gd name="adj" fmla="val 6183"/>
+            </a:avLst>
+          </a:prstGeom>
+          <a:solidFill>
+            <a:schemeClr val="bg1"/>
+          </a:solidFill>
+          <a:ln w="38100">
+            <a:solidFill>
+              <a:schemeClr val="tx1"/>
+            </a:solidFill>
+          </a:ln>
+        </p:spPr>
+        <p:style>
+          <a:lnRef idx="2">
+            <a:schemeClr val="accent1">
+              <a:shade val="15000"/>
+            </a:schemeClr>
+          </a:lnRef>
+          <a:fillRef idx="1">
+            <a:schemeClr val="accent1"/>
+          </a:fillRef>
+          <a:effectRef idx="0">
+            <a:schemeClr val="accent1"/>
+          </a:effectRef>
+          <a:fontRef idx="minor">
+            <a:schemeClr val="lt1"/>
+          </a:fontRef>
+        </p:style>
+        <p:txBody>
+          <a:bodyPr rtlCol="0" anchor="ctr"/>
+          <a:lstStyle/>
+          <a:p>
+            <a:pPr algn="ctr"/>
+            <a:endParaRPr kumimoji="1" lang="ja-JP" altLang="en-US"/>
+          </a:p>
+        </p:txBody>
+      </p:sp>
+      <p:sp>
+        <p:nvSpPr>
+          <p:cNvPr id="7" name="正方形/長方形 6">
+            <a:extLst>
+              <a:ext uri="{FF2B5EF4-FFF2-40B4-BE49-F238E27FC236}">
+                <a16:creationId xmlns:a16="http://schemas.microsoft.com/office/drawing/2014/main" id="{F0E8A1D0-9537-2ECB-F64D-6402B8F72E3D}"/>
+              </a:ext>
+            </a:extLst>
+          </p:cNvPr>
+          <p:cNvSpPr/>
+          <p:nvPr/>
+        </p:nvSpPr>
+        <p:spPr>
+          <a:xfrm>
+            <a:off x="1003103" y="5082288"/>
+            <a:ext cx="2703444" cy="715617"/>
+          </a:xfrm>
+          <a:prstGeom prst="rect">
+            <a:avLst/>
+          </a:prstGeom>
+          <a:solidFill>
+            <a:schemeClr val="bg1"/>
+          </a:solidFill>
+        </p:spPr>
+        <p:style>
+          <a:lnRef idx="2">
+            <a:schemeClr val="accent1">
+              <a:shade val="15000"/>
+            </a:schemeClr>
+          </a:lnRef>
+          <a:fillRef idx="1">
+            <a:schemeClr val="accent1"/>
+          </a:fillRef>
+          <a:effectRef idx="0">
+            <a:schemeClr val="accent1"/>
+          </a:effectRef>
+          <a:fontRef idx="minor">
+            <a:schemeClr val="lt1"/>
+          </a:fontRef>
+        </p:style>
+        <p:txBody>
+          <a:bodyPr rtlCol="0" anchor="ctr"/>
+          <a:lstStyle/>
+          <a:p>
+            <a:pPr algn="ctr"/>
+            <a:r>
+              <a:rPr kumimoji="1" lang="ja-JP" altLang="en-US" dirty="0">
+                <a:solidFill>
+                  <a:srgbClr val="FF0000"/>
+                </a:solidFill>
+                <a:latin typeface="UD デジタル 教科書体 NK-B" panose="02020700000000000000" pitchFamily="18" charset="-128"/>
+                <a:ea typeface="UD デジタル 教科書体 NK-B" panose="02020700000000000000" pitchFamily="18" charset="-128"/>
+              </a:rPr>
+              <a:t>英単語</a:t>
+            </a:r>
+          </a:p>
+        </p:txBody>
+      </p:sp>
+      <p:sp>
+        <p:nvSpPr>
+          <p:cNvPr id="8" name="テキスト ボックス 7">
+            <a:extLst>
+              <a:ext uri="{FF2B5EF4-FFF2-40B4-BE49-F238E27FC236}">
+                <a16:creationId xmlns:a16="http://schemas.microsoft.com/office/drawing/2014/main" id="{ED747F7E-7DAA-F10A-7B3C-92FC8D96FDBA}"/>
+              </a:ext>
+            </a:extLst>
+          </p:cNvPr>
+          <p:cNvSpPr txBox="1"/>
+          <p:nvPr/>
+        </p:nvSpPr>
+        <p:spPr>
+          <a:xfrm>
+            <a:off x="3896714" y="5178486"/>
+            <a:ext cx="542015" cy="523220"/>
+          </a:xfrm>
+          <a:prstGeom prst="rect">
+            <a:avLst/>
+          </a:prstGeom>
+          <a:noFill/>
+        </p:spPr>
+        <p:txBody>
+          <a:bodyPr wrap="square" rtlCol="0">
+            <a:spAutoFit/>
+          </a:bodyPr>
+          <a:lstStyle/>
+          <a:p>
+            <a:r>
+              <a:rPr kumimoji="1" lang="ja-JP" altLang="en-US" sz="2800" dirty="0">
+                <a:latin typeface="UD デジタル 教科書体 NK-B" panose="02020700000000000000" pitchFamily="18" charset="-128"/>
+                <a:ea typeface="UD デジタル 教科書体 NK-B" panose="02020700000000000000" pitchFamily="18" charset="-128"/>
+              </a:rPr>
+              <a:t>の</a:t>
+            </a:r>
+          </a:p>
+        </p:txBody>
+      </p:sp>
+      <p:sp>
+        <p:nvSpPr>
+          <p:cNvPr id="9" name="テキスト ボックス 8">
+            <a:extLst>
+              <a:ext uri="{FF2B5EF4-FFF2-40B4-BE49-F238E27FC236}">
+                <a16:creationId xmlns:a16="http://schemas.microsoft.com/office/drawing/2014/main" id="{08787A87-06F8-339C-137E-F7F657C3A3F0}"/>
+              </a:ext>
+            </a:extLst>
+          </p:cNvPr>
+          <p:cNvSpPr txBox="1"/>
+          <p:nvPr/>
+        </p:nvSpPr>
+        <p:spPr>
+          <a:xfrm>
+            <a:off x="6576967" y="5178486"/>
+            <a:ext cx="542015" cy="523220"/>
+          </a:xfrm>
+          <a:prstGeom prst="rect">
+            <a:avLst/>
+          </a:prstGeom>
+          <a:noFill/>
+        </p:spPr>
+        <p:txBody>
+          <a:bodyPr wrap="square" rtlCol="0">
+            <a:spAutoFit/>
+          </a:bodyPr>
+          <a:lstStyle/>
+          <a:p>
+            <a:r>
+              <a:rPr kumimoji="1" lang="ja-JP" altLang="en-US" sz="2800" dirty="0">
+                <a:latin typeface="UD デジタル 教科書体 NK-B" panose="02020700000000000000" pitchFamily="18" charset="-128"/>
+                <a:ea typeface="UD デジタル 教科書体 NK-B" panose="02020700000000000000" pitchFamily="18" charset="-128"/>
+              </a:rPr>
+              <a:t>を</a:t>
+            </a:r>
+          </a:p>
+        </p:txBody>
+      </p:sp>
+      <p:sp>
+        <p:nvSpPr>
+          <p:cNvPr id="13" name="四角形: 角を丸くする 12">
+            <a:extLst>
+              <a:ext uri="{FF2B5EF4-FFF2-40B4-BE49-F238E27FC236}">
+                <a16:creationId xmlns:a16="http://schemas.microsoft.com/office/drawing/2014/main" id="{D729665E-4881-8738-C963-D79C2142C1FA}"/>
+              </a:ext>
+            </a:extLst>
+          </p:cNvPr>
+          <p:cNvSpPr/>
+          <p:nvPr/>
+        </p:nvSpPr>
+        <p:spPr>
+          <a:xfrm>
+            <a:off x="7320747" y="5043166"/>
+            <a:ext cx="1209923" cy="738147"/>
+          </a:xfrm>
+          <a:prstGeom prst="roundRect">
+            <a:avLst/>
+          </a:prstGeom>
+          <a:solidFill>
+            <a:schemeClr val="tx1"/>
+          </a:solidFill>
+          <a:ln w="38100">
+            <a:noFill/>
+          </a:ln>
+        </p:spPr>
+        <p:style>
+          <a:lnRef idx="2">
+            <a:schemeClr val="accent1">
+              <a:shade val="15000"/>
+            </a:schemeClr>
+          </a:lnRef>
+          <a:fillRef idx="1">
+            <a:schemeClr val="accent1"/>
+          </a:fillRef>
+          <a:effectRef idx="0">
+            <a:schemeClr val="accent1"/>
+          </a:effectRef>
+          <a:fontRef idx="minor">
+            <a:schemeClr val="lt1"/>
+          </a:fontRef>
+        </p:style>
+        <p:txBody>
+          <a:bodyPr rtlCol="0" anchor="ctr"/>
+          <a:lstStyle/>
+          <a:p>
+            <a:pPr algn="ctr"/>
+            <a:endParaRPr kumimoji="1" lang="ja-JP" altLang="en-US"/>
+          </a:p>
+        </p:txBody>
+      </p:sp>
+      <p:sp>
+        <p:nvSpPr>
+          <p:cNvPr id="10" name="正方形/長方形 9">
+            <a:extLst>
+              <a:ext uri="{FF2B5EF4-FFF2-40B4-BE49-F238E27FC236}">
+                <a16:creationId xmlns:a16="http://schemas.microsoft.com/office/drawing/2014/main" id="{B75E9884-2F35-55E5-6B0A-F20F2CE6E20B}"/>
+              </a:ext>
+            </a:extLst>
+          </p:cNvPr>
+          <p:cNvSpPr/>
+          <p:nvPr/>
+        </p:nvSpPr>
+        <p:spPr>
+          <a:xfrm>
+            <a:off x="4665341" y="5051808"/>
+            <a:ext cx="1580985" cy="715617"/>
+          </a:xfrm>
+          <a:prstGeom prst="rect">
+            <a:avLst/>
+          </a:prstGeom>
+          <a:solidFill>
+            <a:schemeClr val="bg1"/>
+          </a:solidFill>
+        </p:spPr>
+        <p:style>
+          <a:lnRef idx="2">
+            <a:schemeClr val="accent1">
+              <a:shade val="15000"/>
+            </a:schemeClr>
+          </a:lnRef>
+          <a:fillRef idx="1">
+            <a:schemeClr val="accent1"/>
+          </a:fillRef>
+          <a:effectRef idx="0">
+            <a:schemeClr val="accent1"/>
+          </a:effectRef>
+          <a:fontRef idx="minor">
+            <a:schemeClr val="lt1"/>
+          </a:fontRef>
+        </p:style>
+        <p:txBody>
+          <a:bodyPr rtlCol="0" anchor="ctr"/>
+          <a:lstStyle/>
+          <a:p>
+            <a:pPr algn="ctr"/>
+            <a:r>
+              <a:rPr kumimoji="1" lang="ja-JP" altLang="en-US" dirty="0">
+                <a:solidFill>
+                  <a:srgbClr val="FF0000"/>
+                </a:solidFill>
+                <a:latin typeface="UD デジタル 教科書体 NK-B" panose="02020700000000000000" pitchFamily="18" charset="-128"/>
+                <a:ea typeface="UD デジタル 教科書体 NK-B" panose="02020700000000000000" pitchFamily="18" charset="-128"/>
+              </a:rPr>
+              <a:t>択一問題</a:t>
+            </a:r>
+          </a:p>
+        </p:txBody>
+      </p:sp>
+      <p:sp>
+        <p:nvSpPr>
+          <p:cNvPr id="12" name="四角形: 角を丸くする 11">
+            <a:extLst>
+              <a:ext uri="{FF2B5EF4-FFF2-40B4-BE49-F238E27FC236}">
+                <a16:creationId xmlns:a16="http://schemas.microsoft.com/office/drawing/2014/main" id="{5CF203F9-329C-42EE-D8A3-66AE82AFB847}"/>
+              </a:ext>
+            </a:extLst>
+          </p:cNvPr>
+          <p:cNvSpPr/>
+          <p:nvPr/>
+        </p:nvSpPr>
+        <p:spPr>
+          <a:xfrm>
+            <a:off x="7277013" y="4990156"/>
+            <a:ext cx="1209923" cy="738147"/>
+          </a:xfrm>
+          <a:prstGeom prst="roundRect">
+            <a:avLst/>
+          </a:prstGeom>
+          <a:solidFill>
+            <a:schemeClr val="tx2">
+              <a:lumMod val="50000"/>
+              <a:lumOff val="50000"/>
+            </a:schemeClr>
+          </a:solidFill>
+          <a:ln w="38100">
+            <a:noFill/>
+          </a:ln>
+        </p:spPr>
+        <p:style>
+          <a:lnRef idx="2">
+            <a:schemeClr val="accent1">
+              <a:shade val="15000"/>
+            </a:schemeClr>
+          </a:lnRef>
+          <a:fillRef idx="1">
+            <a:schemeClr val="accent1"/>
+          </a:fillRef>
+          <a:effectRef idx="0">
+            <a:schemeClr val="accent1"/>
+          </a:effectRef>
+          <a:fontRef idx="minor">
+            <a:schemeClr val="lt1"/>
+          </a:fontRef>
+        </p:style>
+        <p:txBody>
+          <a:bodyPr rtlCol="0" anchor="ctr"/>
+          <a:lstStyle/>
+          <a:p>
+            <a:pPr algn="ctr"/>
+            <a:r>
+              <a:rPr kumimoji="1" lang="en-US" altLang="ja-JP" sz="2400" dirty="0">
+                <a:solidFill>
+                  <a:schemeClr val="bg1"/>
+                </a:solidFill>
+                <a:latin typeface="UD デジタル 教科書体 NK-B" panose="02020700000000000000" pitchFamily="18" charset="-128"/>
+                <a:ea typeface="UD デジタル 教科書体 NK-B" panose="02020700000000000000" pitchFamily="18" charset="-128"/>
+              </a:rPr>
+              <a:t>PLAY</a:t>
+            </a:r>
+            <a:endParaRPr kumimoji="1" lang="ja-JP" altLang="en-US" sz="2400" dirty="0">
+              <a:solidFill>
+                <a:schemeClr val="bg1"/>
+              </a:solidFill>
+              <a:latin typeface="UD デジタル 教科書体 NK-B" panose="02020700000000000000" pitchFamily="18" charset="-128"/>
+              <a:ea typeface="UD デジタル 教科書体 NK-B" panose="02020700000000000000" pitchFamily="18" charset="-128"/>
+            </a:endParaRPr>
+          </a:p>
+        </p:txBody>
+      </p:sp>
+      <p:sp>
+        <p:nvSpPr>
+          <p:cNvPr id="14" name="テキスト ボックス 13">
+            <a:extLst>
+              <a:ext uri="{FF2B5EF4-FFF2-40B4-BE49-F238E27FC236}">
+                <a16:creationId xmlns:a16="http://schemas.microsoft.com/office/drawing/2014/main" id="{0C27F492-3DA4-FDF3-10C6-2DE1CDC2DE4A}"/>
+              </a:ext>
+            </a:extLst>
+          </p:cNvPr>
+          <p:cNvSpPr txBox="1"/>
+          <p:nvPr/>
+        </p:nvSpPr>
+        <p:spPr>
+          <a:xfrm>
+            <a:off x="937257" y="994732"/>
+            <a:ext cx="812477" cy="400110"/>
+          </a:xfrm>
+          <a:prstGeom prst="rect">
+            <a:avLst/>
+          </a:prstGeom>
+          <a:noFill/>
+        </p:spPr>
+        <p:txBody>
+          <a:bodyPr wrap="square" rtlCol="0">
+            <a:spAutoFit/>
+          </a:bodyPr>
+          <a:lstStyle/>
+          <a:p>
+            <a:r>
+              <a:rPr kumimoji="1" lang="ja-JP" altLang="en-US" sz="2000" dirty="0">
+                <a:latin typeface="UD デジタル 教科書体 NK-B" panose="02020700000000000000" pitchFamily="18" charset="-128"/>
+                <a:ea typeface="UD デジタル 教科書体 NK-B" panose="02020700000000000000" pitchFamily="18" charset="-128"/>
+              </a:rPr>
+              <a:t>範囲</a:t>
+            </a:r>
+          </a:p>
+        </p:txBody>
+      </p:sp>
+      <p:sp>
+        <p:nvSpPr>
+          <p:cNvPr id="15" name="テキスト ボックス 14">
+            <a:extLst>
+              <a:ext uri="{FF2B5EF4-FFF2-40B4-BE49-F238E27FC236}">
+                <a16:creationId xmlns:a16="http://schemas.microsoft.com/office/drawing/2014/main" id="{C4B19724-15FF-0C5E-6778-E9DA22016343}"/>
+              </a:ext>
+            </a:extLst>
+          </p:cNvPr>
+          <p:cNvSpPr txBox="1"/>
+          <p:nvPr/>
+        </p:nvSpPr>
+        <p:spPr>
+          <a:xfrm>
+            <a:off x="961455" y="3516252"/>
+            <a:ext cx="925551" cy="400110"/>
+          </a:xfrm>
+          <a:prstGeom prst="rect">
+            <a:avLst/>
+          </a:prstGeom>
+          <a:noFill/>
+        </p:spPr>
+        <p:txBody>
+          <a:bodyPr wrap="square" rtlCol="0">
+            <a:spAutoFit/>
+          </a:bodyPr>
+          <a:lstStyle/>
+          <a:p>
+            <a:r>
+              <a:rPr kumimoji="1" lang="ja-JP" altLang="en-US" sz="2000" dirty="0">
+                <a:latin typeface="UD デジタル 教科書体 NK-B" panose="02020700000000000000" pitchFamily="18" charset="-128"/>
+                <a:ea typeface="UD デジタル 教科書体 NK-B" panose="02020700000000000000" pitchFamily="18" charset="-128"/>
+              </a:rPr>
+              <a:t>形式</a:t>
+            </a:r>
+          </a:p>
+        </p:txBody>
+      </p:sp>
+      <p:sp>
+        <p:nvSpPr>
+          <p:cNvPr id="16" name="正方形/長方形 15">
+            <a:extLst>
+              <a:ext uri="{FF2B5EF4-FFF2-40B4-BE49-F238E27FC236}">
+                <a16:creationId xmlns:a16="http://schemas.microsoft.com/office/drawing/2014/main" id="{178686CE-FDBF-A877-C098-999004D042D5}"/>
+              </a:ext>
+            </a:extLst>
+          </p:cNvPr>
+          <p:cNvSpPr/>
+          <p:nvPr/>
+        </p:nvSpPr>
+        <p:spPr>
+          <a:xfrm>
+            <a:off x="1443824" y="4079295"/>
+            <a:ext cx="242621" cy="222636"/>
+          </a:xfrm>
+          <a:prstGeom prst="rect">
+            <a:avLst/>
+          </a:prstGeom>
+          <a:solidFill>
+            <a:schemeClr val="bg1"/>
+          </a:solidFill>
+          <a:ln>
+            <a:solidFill>
+              <a:schemeClr val="tx1"/>
+            </a:solidFill>
+          </a:ln>
+        </p:spPr>
+        <p:style>
+          <a:lnRef idx="2">
+            <a:schemeClr val="accent1">
+              <a:shade val="15000"/>
+            </a:schemeClr>
+          </a:lnRef>
+          <a:fillRef idx="1">
+            <a:schemeClr val="accent1"/>
+          </a:fillRef>
+          <a:effectRef idx="0">
+            <a:schemeClr val="accent1"/>
+          </a:effectRef>
+          <a:fontRef idx="minor">
+            <a:schemeClr val="lt1"/>
+          </a:fontRef>
+        </p:style>
+        <p:txBody>
+          <a:bodyPr rtlCol="0" anchor="ctr"/>
+          <a:lstStyle/>
+          <a:p>
+            <a:pPr algn="ctr"/>
+            <a:endParaRPr kumimoji="1" lang="ja-JP" altLang="en-US" sz="1600"/>
+          </a:p>
+        </p:txBody>
+      </p:sp>
+      <p:sp>
+        <p:nvSpPr>
+          <p:cNvPr id="17" name="テキスト ボックス 16">
+            <a:extLst>
+              <a:ext uri="{FF2B5EF4-FFF2-40B4-BE49-F238E27FC236}">
+                <a16:creationId xmlns:a16="http://schemas.microsoft.com/office/drawing/2014/main" id="{ED92B3FE-57C3-5BDB-0406-1AAD7AF77708}"/>
+              </a:ext>
+            </a:extLst>
+          </p:cNvPr>
+          <p:cNvSpPr txBox="1"/>
+          <p:nvPr/>
+        </p:nvSpPr>
+        <p:spPr>
+          <a:xfrm>
+            <a:off x="1766518" y="3969716"/>
+            <a:ext cx="1638431" cy="400110"/>
+          </a:xfrm>
+          <a:prstGeom prst="rect">
+            <a:avLst/>
+          </a:prstGeom>
+          <a:noFill/>
+        </p:spPr>
+        <p:txBody>
+          <a:bodyPr wrap="square" rtlCol="0">
+            <a:spAutoFit/>
+          </a:bodyPr>
+          <a:lstStyle/>
+          <a:p>
+            <a:r>
+              <a:rPr kumimoji="1" lang="ja-JP" altLang="en-US" sz="2000" dirty="0">
+                <a:latin typeface="UD デジタル 教科書体 NK-B" panose="02020700000000000000" pitchFamily="18" charset="-128"/>
+                <a:ea typeface="UD デジタル 教科書体 NK-B" panose="02020700000000000000" pitchFamily="18" charset="-128"/>
+              </a:rPr>
+              <a:t>択一問題</a:t>
+            </a:r>
+          </a:p>
+        </p:txBody>
+      </p:sp>
+      <p:sp>
+        <p:nvSpPr>
+          <p:cNvPr id="18" name="正方形/長方形 17">
+            <a:extLst>
+              <a:ext uri="{FF2B5EF4-FFF2-40B4-BE49-F238E27FC236}">
+                <a16:creationId xmlns:a16="http://schemas.microsoft.com/office/drawing/2014/main" id="{454F5E39-2F6C-0CAA-1D5C-AF8CB06ECF72}"/>
+              </a:ext>
+            </a:extLst>
+          </p:cNvPr>
+          <p:cNvSpPr/>
+          <p:nvPr/>
+        </p:nvSpPr>
+        <p:spPr>
+          <a:xfrm>
+            <a:off x="3619168" y="4075847"/>
+            <a:ext cx="242621" cy="222636"/>
+          </a:xfrm>
+          <a:prstGeom prst="rect">
+            <a:avLst/>
+          </a:prstGeom>
+          <a:solidFill>
+            <a:schemeClr val="bg1"/>
+          </a:solidFill>
+          <a:ln>
+            <a:solidFill>
+              <a:schemeClr val="tx1"/>
+            </a:solidFill>
+          </a:ln>
+        </p:spPr>
+        <p:style>
+          <a:lnRef idx="2">
+            <a:schemeClr val="accent1">
+              <a:shade val="15000"/>
+            </a:schemeClr>
+          </a:lnRef>
+          <a:fillRef idx="1">
+            <a:schemeClr val="accent1"/>
+          </a:fillRef>
+          <a:effectRef idx="0">
+            <a:schemeClr val="accent1"/>
+          </a:effectRef>
+          <a:fontRef idx="minor">
+            <a:schemeClr val="lt1"/>
+          </a:fontRef>
+        </p:style>
+        <p:txBody>
+          <a:bodyPr rtlCol="0" anchor="ctr"/>
+          <a:lstStyle/>
+          <a:p>
+            <a:pPr algn="ctr"/>
+            <a:endParaRPr kumimoji="1" lang="ja-JP" altLang="en-US" sz="1600"/>
+          </a:p>
+        </p:txBody>
+      </p:sp>
+      <p:sp>
+        <p:nvSpPr>
+          <p:cNvPr id="19" name="テキスト ボックス 18">
+            <a:extLst>
+              <a:ext uri="{FF2B5EF4-FFF2-40B4-BE49-F238E27FC236}">
+                <a16:creationId xmlns:a16="http://schemas.microsoft.com/office/drawing/2014/main" id="{7E9016E7-2FE8-7673-CC9A-2B5A66E03427}"/>
+              </a:ext>
+            </a:extLst>
+          </p:cNvPr>
+          <p:cNvSpPr txBox="1"/>
+          <p:nvPr/>
+        </p:nvSpPr>
+        <p:spPr>
+          <a:xfrm>
+            <a:off x="3941862" y="3966268"/>
+            <a:ext cx="1638431" cy="400110"/>
+          </a:xfrm>
+          <a:prstGeom prst="rect">
+            <a:avLst/>
+          </a:prstGeom>
+          <a:noFill/>
+        </p:spPr>
+        <p:txBody>
+          <a:bodyPr wrap="square" rtlCol="0">
+            <a:spAutoFit/>
+          </a:bodyPr>
+          <a:lstStyle/>
+          <a:p>
+            <a:r>
+              <a:rPr kumimoji="1" lang="ja-JP" altLang="en-US" sz="2000" dirty="0">
+                <a:latin typeface="UD デジタル 教科書体 NK-B" panose="02020700000000000000" pitchFamily="18" charset="-128"/>
+                <a:ea typeface="UD デジタル 教科書体 NK-B" panose="02020700000000000000" pitchFamily="18" charset="-128"/>
+              </a:rPr>
+              <a:t>記述問題</a:t>
+            </a:r>
+          </a:p>
+        </p:txBody>
+      </p:sp>
+      <p:sp>
+        <p:nvSpPr>
+          <p:cNvPr id="21" name="四角形: 角を丸くする 20">
+            <a:extLst>
+              <a:ext uri="{FF2B5EF4-FFF2-40B4-BE49-F238E27FC236}">
+                <a16:creationId xmlns:a16="http://schemas.microsoft.com/office/drawing/2014/main" id="{A6AF4621-FC12-7573-9270-35067AFD8BD7}"/>
+              </a:ext>
+            </a:extLst>
+          </p:cNvPr>
+          <p:cNvSpPr/>
+          <p:nvPr/>
+        </p:nvSpPr>
+        <p:spPr>
+          <a:xfrm>
+            <a:off x="7209503" y="707666"/>
+            <a:ext cx="2474510" cy="3883525"/>
+          </a:xfrm>
+          <a:prstGeom prst="roundRect">
+            <a:avLst>
+              <a:gd name="adj" fmla="val 7881"/>
+            </a:avLst>
+          </a:prstGeom>
+          <a:solidFill>
+            <a:srgbClr val="FFFF66"/>
+          </a:solidFill>
+          <a:ln w="38100">
+            <a:solidFill>
+              <a:schemeClr val="tx1"/>
+            </a:solidFill>
+          </a:ln>
+        </p:spPr>
+        <p:style>
+          <a:lnRef idx="2">
+            <a:schemeClr val="accent1">
+              <a:shade val="15000"/>
+            </a:schemeClr>
+          </a:lnRef>
+          <a:fillRef idx="1">
+            <a:schemeClr val="accent1"/>
+          </a:fillRef>
+          <a:effectRef idx="0">
+            <a:schemeClr val="accent1"/>
+          </a:effectRef>
+          <a:fontRef idx="minor">
+            <a:schemeClr val="lt1"/>
+          </a:fontRef>
+        </p:style>
+        <p:txBody>
+          <a:bodyPr rtlCol="0" anchor="ctr"/>
+          <a:lstStyle/>
+          <a:p>
+            <a:pPr algn="ctr"/>
+            <a:endParaRPr kumimoji="1" lang="ja-JP" altLang="en-US"/>
+          </a:p>
+        </p:txBody>
+      </p:sp>
+      <p:sp>
+        <p:nvSpPr>
+          <p:cNvPr id="22" name="テキスト ボックス 21">
+            <a:extLst>
+              <a:ext uri="{FF2B5EF4-FFF2-40B4-BE49-F238E27FC236}">
+                <a16:creationId xmlns:a16="http://schemas.microsoft.com/office/drawing/2014/main" id="{24343927-0240-A2B5-D1E9-DAD37EEA4481}"/>
+              </a:ext>
+            </a:extLst>
+          </p:cNvPr>
+          <p:cNvSpPr txBox="1"/>
+          <p:nvPr/>
+        </p:nvSpPr>
+        <p:spPr>
+          <a:xfrm>
+            <a:off x="7327281" y="1317823"/>
+            <a:ext cx="990102" cy="369332"/>
+          </a:xfrm>
+          <a:prstGeom prst="rect">
+            <a:avLst/>
+          </a:prstGeom>
+          <a:noFill/>
+        </p:spPr>
+        <p:txBody>
+          <a:bodyPr wrap="square" rtlCol="0">
+            <a:spAutoFit/>
+          </a:bodyPr>
+          <a:lstStyle/>
+          <a:p>
+            <a:r>
+              <a:rPr kumimoji="1" lang="en-US" altLang="ja-JP" dirty="0">
+                <a:latin typeface="UD デジタル 教科書体 NK-B" panose="02020700000000000000" pitchFamily="18" charset="-128"/>
+                <a:ea typeface="UD デジタル 教科書体 NK-B" panose="02020700000000000000" pitchFamily="18" charset="-128"/>
+              </a:rPr>
+              <a:t>STEP1</a:t>
+            </a:r>
+            <a:endParaRPr kumimoji="1" lang="ja-JP" altLang="en-US" dirty="0">
+              <a:latin typeface="UD デジタル 教科書体 NK-B" panose="02020700000000000000" pitchFamily="18" charset="-128"/>
+              <a:ea typeface="UD デジタル 教科書体 NK-B" panose="02020700000000000000" pitchFamily="18" charset="-128"/>
+            </a:endParaRPr>
+          </a:p>
+        </p:txBody>
+      </p:sp>
+      <p:sp>
+        <p:nvSpPr>
+          <p:cNvPr id="23" name="テキスト ボックス 22">
+            <a:extLst>
+              <a:ext uri="{FF2B5EF4-FFF2-40B4-BE49-F238E27FC236}">
+                <a16:creationId xmlns:a16="http://schemas.microsoft.com/office/drawing/2014/main" id="{F8D0FF15-1DC6-6337-0217-C5700C938A02}"/>
+              </a:ext>
+            </a:extLst>
+          </p:cNvPr>
+          <p:cNvSpPr txBox="1"/>
+          <p:nvPr/>
+        </p:nvSpPr>
+        <p:spPr>
+          <a:xfrm>
+            <a:off x="7455825" y="1632001"/>
+            <a:ext cx="2168389" cy="646331"/>
+          </a:xfrm>
+          <a:prstGeom prst="rect">
+            <a:avLst/>
+          </a:prstGeom>
+          <a:noFill/>
+        </p:spPr>
+        <p:txBody>
+          <a:bodyPr wrap="square" rtlCol="0">
+            <a:spAutoFit/>
+          </a:bodyPr>
+          <a:lstStyle/>
+          <a:p>
+            <a:r>
+              <a:rPr kumimoji="1" lang="ja-JP" altLang="en-US" dirty="0">
+                <a:latin typeface="UD デジタル 教科書体 NK-B" panose="02020700000000000000" pitchFamily="18" charset="-128"/>
+                <a:ea typeface="UD デジタル 教科書体 NK-B" panose="02020700000000000000" pitchFamily="18" charset="-128"/>
+              </a:rPr>
+              <a:t>どの辞書から問題を出題するか選択</a:t>
+            </a:r>
+          </a:p>
+        </p:txBody>
+      </p:sp>
+      <p:sp>
+        <p:nvSpPr>
+          <p:cNvPr id="24" name="テキスト ボックス 23">
+            <a:extLst>
+              <a:ext uri="{FF2B5EF4-FFF2-40B4-BE49-F238E27FC236}">
+                <a16:creationId xmlns:a16="http://schemas.microsoft.com/office/drawing/2014/main" id="{98C2C621-A22B-4CC8-8CEB-B2BA9FB713F1}"/>
+              </a:ext>
+            </a:extLst>
+          </p:cNvPr>
+          <p:cNvSpPr txBox="1"/>
+          <p:nvPr/>
+        </p:nvSpPr>
+        <p:spPr>
+          <a:xfrm>
+            <a:off x="7351552" y="2481088"/>
+            <a:ext cx="990102" cy="369332"/>
+          </a:xfrm>
+          <a:prstGeom prst="rect">
+            <a:avLst/>
+          </a:prstGeom>
+          <a:noFill/>
+        </p:spPr>
+        <p:txBody>
+          <a:bodyPr wrap="square" rtlCol="0">
+            <a:spAutoFit/>
+          </a:bodyPr>
+          <a:lstStyle/>
+          <a:p>
+            <a:r>
+              <a:rPr kumimoji="1" lang="en-US" altLang="ja-JP" dirty="0">
+                <a:latin typeface="UD デジタル 教科書体 NK-B" panose="02020700000000000000" pitchFamily="18" charset="-128"/>
+                <a:ea typeface="UD デジタル 教科書体 NK-B" panose="02020700000000000000" pitchFamily="18" charset="-128"/>
+              </a:rPr>
+              <a:t>STEP2</a:t>
+            </a:r>
+            <a:endParaRPr kumimoji="1" lang="ja-JP" altLang="en-US" dirty="0">
+              <a:latin typeface="UD デジタル 教科書体 NK-B" panose="02020700000000000000" pitchFamily="18" charset="-128"/>
+              <a:ea typeface="UD デジタル 教科書体 NK-B" panose="02020700000000000000" pitchFamily="18" charset="-128"/>
+            </a:endParaRPr>
+          </a:p>
+        </p:txBody>
+      </p:sp>
+      <p:sp>
+        <p:nvSpPr>
+          <p:cNvPr id="25" name="テキスト ボックス 24">
+            <a:extLst>
+              <a:ext uri="{FF2B5EF4-FFF2-40B4-BE49-F238E27FC236}">
+                <a16:creationId xmlns:a16="http://schemas.microsoft.com/office/drawing/2014/main" id="{785C80B6-DB79-4DE5-6DC2-A66E388F7364}"/>
+              </a:ext>
+            </a:extLst>
+          </p:cNvPr>
+          <p:cNvSpPr txBox="1"/>
+          <p:nvPr/>
+        </p:nvSpPr>
+        <p:spPr>
+          <a:xfrm>
+            <a:off x="7455824" y="2837927"/>
+            <a:ext cx="2168389" cy="369332"/>
+          </a:xfrm>
+          <a:prstGeom prst="rect">
+            <a:avLst/>
+          </a:prstGeom>
+          <a:noFill/>
+        </p:spPr>
+        <p:txBody>
+          <a:bodyPr wrap="square" rtlCol="0">
+            <a:spAutoFit/>
+          </a:bodyPr>
+          <a:lstStyle/>
+          <a:p>
+            <a:r>
+              <a:rPr kumimoji="1" lang="ja-JP" altLang="en-US" dirty="0">
+                <a:latin typeface="UD デジタル 教科書体 NK-B" panose="02020700000000000000" pitchFamily="18" charset="-128"/>
+                <a:ea typeface="UD デジタル 教科書体 NK-B" panose="02020700000000000000" pitchFamily="18" charset="-128"/>
+              </a:rPr>
+              <a:t>出題形式を選択</a:t>
+            </a:r>
+          </a:p>
+        </p:txBody>
+      </p:sp>
+      <p:sp>
+        <p:nvSpPr>
+          <p:cNvPr id="26" name="テキスト ボックス 25">
+            <a:extLst>
+              <a:ext uri="{FF2B5EF4-FFF2-40B4-BE49-F238E27FC236}">
+                <a16:creationId xmlns:a16="http://schemas.microsoft.com/office/drawing/2014/main" id="{BD88AF24-D343-770C-18E5-63592FA6A8D7}"/>
+              </a:ext>
+            </a:extLst>
+          </p:cNvPr>
+          <p:cNvSpPr txBox="1"/>
+          <p:nvPr/>
+        </p:nvSpPr>
+        <p:spPr>
+          <a:xfrm>
+            <a:off x="7351552" y="3357005"/>
+            <a:ext cx="990102" cy="369332"/>
+          </a:xfrm>
+          <a:prstGeom prst="rect">
+            <a:avLst/>
+          </a:prstGeom>
+          <a:noFill/>
+        </p:spPr>
+        <p:txBody>
+          <a:bodyPr wrap="square" rtlCol="0">
+            <a:spAutoFit/>
+          </a:bodyPr>
+          <a:lstStyle/>
+          <a:p>
+            <a:r>
+              <a:rPr kumimoji="1" lang="en-US" altLang="ja-JP" dirty="0">
+                <a:latin typeface="UD デジタル 教科書体 NK-B" panose="02020700000000000000" pitchFamily="18" charset="-128"/>
+                <a:ea typeface="UD デジタル 教科書体 NK-B" panose="02020700000000000000" pitchFamily="18" charset="-128"/>
+              </a:rPr>
+              <a:t>STEP3</a:t>
+            </a:r>
+            <a:endParaRPr kumimoji="1" lang="ja-JP" altLang="en-US" dirty="0">
+              <a:latin typeface="UD デジタル 教科書体 NK-B" panose="02020700000000000000" pitchFamily="18" charset="-128"/>
+              <a:ea typeface="UD デジタル 教科書体 NK-B" panose="02020700000000000000" pitchFamily="18" charset="-128"/>
+            </a:endParaRPr>
+          </a:p>
+        </p:txBody>
+      </p:sp>
+      <p:sp>
+        <p:nvSpPr>
+          <p:cNvPr id="27" name="テキスト ボックス 26">
+            <a:extLst>
+              <a:ext uri="{FF2B5EF4-FFF2-40B4-BE49-F238E27FC236}">
+                <a16:creationId xmlns:a16="http://schemas.microsoft.com/office/drawing/2014/main" id="{51C68087-ED66-DF07-F1D3-91816AF8C692}"/>
+              </a:ext>
+            </a:extLst>
+          </p:cNvPr>
+          <p:cNvSpPr txBox="1"/>
+          <p:nvPr/>
+        </p:nvSpPr>
+        <p:spPr>
+          <a:xfrm>
+            <a:off x="8201510" y="3789432"/>
+            <a:ext cx="1282558" cy="369332"/>
+          </a:xfrm>
+          <a:prstGeom prst="rect">
+            <a:avLst/>
+          </a:prstGeom>
+          <a:noFill/>
+        </p:spPr>
+        <p:txBody>
+          <a:bodyPr wrap="square" rtlCol="0">
+            <a:spAutoFit/>
+          </a:bodyPr>
+          <a:lstStyle/>
+          <a:p>
+            <a:r>
+              <a:rPr kumimoji="1" lang="ja-JP" altLang="en-US" dirty="0">
+                <a:latin typeface="UD デジタル 教科書体 NK-B" panose="02020700000000000000" pitchFamily="18" charset="-128"/>
+                <a:ea typeface="UD デジタル 教科書体 NK-B" panose="02020700000000000000" pitchFamily="18" charset="-128"/>
+              </a:rPr>
+              <a:t>を押下</a:t>
+            </a:r>
+          </a:p>
+        </p:txBody>
+      </p:sp>
+      <p:sp>
+        <p:nvSpPr>
+          <p:cNvPr id="28" name="四角形: 角を丸くする 27">
+            <a:extLst>
+              <a:ext uri="{FF2B5EF4-FFF2-40B4-BE49-F238E27FC236}">
+                <a16:creationId xmlns:a16="http://schemas.microsoft.com/office/drawing/2014/main" id="{05497452-17B0-BAF9-E55C-C9265DB8B251}"/>
+              </a:ext>
+            </a:extLst>
+          </p:cNvPr>
+          <p:cNvSpPr/>
+          <p:nvPr/>
+        </p:nvSpPr>
+        <p:spPr>
+          <a:xfrm>
+            <a:off x="7483156" y="3766854"/>
+            <a:ext cx="722909" cy="417263"/>
+          </a:xfrm>
+          <a:prstGeom prst="roundRect">
+            <a:avLst/>
+          </a:prstGeom>
+          <a:solidFill>
+            <a:schemeClr val="tx2">
+              <a:lumMod val="50000"/>
+              <a:lumOff val="50000"/>
+            </a:schemeClr>
+          </a:solidFill>
+          <a:ln w="38100">
+            <a:noFill/>
+          </a:ln>
+        </p:spPr>
+        <p:style>
+          <a:lnRef idx="2">
+            <a:schemeClr val="accent1">
+              <a:shade val="15000"/>
+            </a:schemeClr>
+          </a:lnRef>
+          <a:fillRef idx="1">
+            <a:schemeClr val="accent1"/>
+          </a:fillRef>
+          <a:effectRef idx="0">
+            <a:schemeClr val="accent1"/>
+          </a:effectRef>
+          <a:fontRef idx="minor">
+            <a:schemeClr val="lt1"/>
+          </a:fontRef>
+        </p:style>
+        <p:txBody>
+          <a:bodyPr rtlCol="0" anchor="ctr"/>
+          <a:lstStyle/>
+          <a:p>
+            <a:pPr algn="ctr"/>
+            <a:r>
+              <a:rPr kumimoji="1" lang="en-US" altLang="ja-JP" sz="1400" dirty="0">
+                <a:solidFill>
+                  <a:schemeClr val="bg1"/>
+                </a:solidFill>
+                <a:latin typeface="UD デジタル 教科書体 NK-B" panose="02020700000000000000" pitchFamily="18" charset="-128"/>
+                <a:ea typeface="UD デジタル 教科書体 NK-B" panose="02020700000000000000" pitchFamily="18" charset="-128"/>
+              </a:rPr>
+              <a:t>PLAY</a:t>
+            </a:r>
+            <a:endParaRPr kumimoji="1" lang="ja-JP" altLang="en-US" sz="1400" dirty="0">
+              <a:solidFill>
+                <a:schemeClr val="bg1"/>
+              </a:solidFill>
+              <a:latin typeface="UD デジタル 教科書体 NK-B" panose="02020700000000000000" pitchFamily="18" charset="-128"/>
+              <a:ea typeface="UD デジタル 教科書体 NK-B" panose="02020700000000000000" pitchFamily="18" charset="-128"/>
+            </a:endParaRPr>
+          </a:p>
+        </p:txBody>
+      </p:sp>
+      <p:sp>
+        <p:nvSpPr>
+          <p:cNvPr id="20" name="テキスト ボックス 19">
+            <a:extLst>
+              <a:ext uri="{FF2B5EF4-FFF2-40B4-BE49-F238E27FC236}">
+                <a16:creationId xmlns:a16="http://schemas.microsoft.com/office/drawing/2014/main" id="{CE8C2C27-0198-17E2-B0D6-ED8700364A65}"/>
+              </a:ext>
+            </a:extLst>
+          </p:cNvPr>
+          <p:cNvSpPr txBox="1"/>
+          <p:nvPr/>
+        </p:nvSpPr>
+        <p:spPr>
+          <a:xfrm>
+            <a:off x="7186226" y="359033"/>
+            <a:ext cx="2707584" cy="523220"/>
+          </a:xfrm>
+          <a:prstGeom prst="rect">
+            <a:avLst/>
+          </a:prstGeom>
+          <a:noFill/>
+        </p:spPr>
+        <p:txBody>
+          <a:bodyPr wrap="square" rtlCol="0">
+            <a:spAutoFit/>
+          </a:bodyPr>
+          <a:lstStyle/>
+          <a:p>
+            <a:pPr algn="ctr"/>
+            <a:r>
+              <a:rPr kumimoji="1" lang="en-US" altLang="ja-JP" sz="2800" dirty="0">
+                <a:ln w="12700">
+                  <a:solidFill>
+                    <a:schemeClr val="tx1"/>
+                  </a:solidFill>
+                </a:ln>
+                <a:solidFill>
+                  <a:schemeClr val="bg1"/>
+                </a:solidFill>
+                <a:latin typeface="UD デジタル 教科書体 NK-B" panose="02020700000000000000" pitchFamily="18" charset="-128"/>
+                <a:ea typeface="UD デジタル 教科書体 NK-B" panose="02020700000000000000" pitchFamily="18" charset="-128"/>
+              </a:rPr>
+              <a:t>How To PLAY</a:t>
+            </a:r>
+            <a:endParaRPr kumimoji="1" lang="ja-JP" altLang="en-US" sz="2800" dirty="0">
+              <a:ln w="12700">
+                <a:solidFill>
+                  <a:schemeClr val="tx1"/>
+                </a:solidFill>
+              </a:ln>
+              <a:solidFill>
+                <a:schemeClr val="bg1"/>
+              </a:solidFill>
+              <a:latin typeface="UD デジタル 教科書体 NK-B" panose="02020700000000000000" pitchFamily="18" charset="-128"/>
+              <a:ea typeface="UD デジタル 教科書体 NK-B" panose="02020700000000000000" pitchFamily="18" charset="-128"/>
+            </a:endParaRPr>
+          </a:p>
+        </p:txBody>
+      </p:sp>
+      <p:sp>
+        <p:nvSpPr>
+          <p:cNvPr id="33" name="テキスト ボックス 32">
+            <a:extLst>
+              <a:ext uri="{FF2B5EF4-FFF2-40B4-BE49-F238E27FC236}">
+                <a16:creationId xmlns:a16="http://schemas.microsoft.com/office/drawing/2014/main" id="{2A7D2E22-D0E0-925B-39E8-817B4603FFD3}"/>
+              </a:ext>
+            </a:extLst>
+          </p:cNvPr>
+          <p:cNvSpPr txBox="1"/>
+          <p:nvPr/>
+        </p:nvSpPr>
+        <p:spPr>
+          <a:xfrm>
+            <a:off x="236571" y="214755"/>
+            <a:ext cx="3059894" cy="646331"/>
+          </a:xfrm>
+          <a:prstGeom prst="rect">
+            <a:avLst/>
+          </a:prstGeom>
+          <a:noFill/>
+        </p:spPr>
+        <p:txBody>
+          <a:bodyPr wrap="square" rtlCol="0">
+            <a:spAutoFit/>
+          </a:bodyPr>
+          <a:lstStyle/>
+          <a:p>
+            <a:pPr algn="ctr"/>
+            <a:r>
+              <a:rPr kumimoji="1" lang="en-US" altLang="ja-JP" sz="3600" dirty="0">
+                <a:ln w="12700">
+                  <a:solidFill>
+                    <a:schemeClr val="tx1"/>
+                  </a:solidFill>
+                </a:ln>
+                <a:solidFill>
+                  <a:schemeClr val="bg1"/>
+                </a:solidFill>
+                <a:latin typeface="UD デジタル 教科書体 NK-B" panose="02020700000000000000" pitchFamily="18" charset="-128"/>
+                <a:ea typeface="UD デジタル 教科書体 NK-B" panose="02020700000000000000" pitchFamily="18" charset="-128"/>
+              </a:rPr>
+              <a:t>Choose</a:t>
+            </a:r>
+            <a:endParaRPr kumimoji="1" lang="ja-JP" altLang="en-US" sz="3600" dirty="0">
+              <a:ln w="12700">
+                <a:solidFill>
+                  <a:schemeClr val="tx1"/>
+                </a:solidFill>
+              </a:ln>
+              <a:solidFill>
+                <a:schemeClr val="bg1"/>
+              </a:solidFill>
+              <a:latin typeface="UD デジタル 教科書体 NK-B" panose="02020700000000000000" pitchFamily="18" charset="-128"/>
+              <a:ea typeface="UD デジタル 教科書体 NK-B" panose="02020700000000000000" pitchFamily="18" charset="-128"/>
+            </a:endParaRPr>
+          </a:p>
+        </p:txBody>
+      </p:sp>
+    </p:spTree>
+    <p:extLst>
+      <p:ext uri="{BB962C8B-B14F-4D97-AF65-F5344CB8AC3E}">
+        <p14:creationId xmlns:p14="http://schemas.microsoft.com/office/powerpoint/2010/main" val="1409451747"/>
+      </p:ext>
+    </p:extLst>
+  </p:cSld>
+  <p:clrMapOvr>
+    <a:masterClrMapping/>
+  </p:clrMapOvr>
+</p:sld>
+</file>
+
+<file path=ppt/slides/slide3.xml><?xml version="1.0" encoding="utf-8"?>
+<p:sld xmlns:a="http://schemas.openxmlformats.org/drawingml/2006/main" xmlns:r="http://schemas.openxmlformats.org/officeDocument/2006/relationships" xmlns:p="http://schemas.openxmlformats.org/presentationml/2006/main">
+  <p:cSld>
+    <p:bg>
+      <p:bgPr>
+        <a:solidFill>
           <a:schemeClr val="bg1"/>
         </a:solidFill>
         <a:effectLst/>
@@ -3867,86 +5806,6 @@
       </p:pic>
       <p:sp>
         <p:nvSpPr>
-          <p:cNvPr id="8" name="テキスト ボックス 7">
-            <a:extLst>
-              <a:ext uri="{FF2B5EF4-FFF2-40B4-BE49-F238E27FC236}">
-                <a16:creationId xmlns:a16="http://schemas.microsoft.com/office/drawing/2014/main" id="{F019535F-47F6-F17C-F172-1F0BB0205473}"/>
-              </a:ext>
-            </a:extLst>
-          </p:cNvPr>
-          <p:cNvSpPr txBox="1"/>
-          <p:nvPr/>
-        </p:nvSpPr>
-        <p:spPr>
-          <a:xfrm>
-            <a:off x="5803066" y="1247123"/>
-            <a:ext cx="6211134" cy="830997"/>
-          </a:xfrm>
-          <a:prstGeom prst="rect">
-            <a:avLst/>
-          </a:prstGeom>
-          <a:noFill/>
-        </p:spPr>
-        <p:txBody>
-          <a:bodyPr wrap="square" rtlCol="0">
-            <a:spAutoFit/>
-          </a:bodyPr>
-          <a:lstStyle/>
-          <a:p>
-            <a:r>
-              <a:rPr lang="en-US" altLang="ja-JP" sz="4800" spc="-300" dirty="0">
-                <a:solidFill>
-                  <a:schemeClr val="tx1">
-                    <a:lumMod val="65000"/>
-                    <a:lumOff val="35000"/>
-                  </a:schemeClr>
-                </a:solidFill>
-                <a:latin typeface="HGP明朝E" panose="02020900000000000000" pitchFamily="18" charset="-128"/>
-                <a:ea typeface="HGP明朝E" panose="02020900000000000000" pitchFamily="18" charset="-128"/>
-              </a:rPr>
-              <a:t>/</a:t>
-            </a:r>
-            <a:r>
-              <a:rPr lang="en-US" altLang="ja-JP" sz="4800" spc="-300" dirty="0" err="1">
-                <a:solidFill>
-                  <a:schemeClr val="tx1">
-                    <a:lumMod val="65000"/>
-                    <a:lumOff val="35000"/>
-                  </a:schemeClr>
-                </a:solidFill>
-                <a:latin typeface="HGP明朝E" panose="02020900000000000000" pitchFamily="18" charset="-128"/>
-                <a:ea typeface="HGP明朝E" panose="02020900000000000000" pitchFamily="18" charset="-128"/>
-              </a:rPr>
-              <a:t>jíshòjíshò</a:t>
-            </a:r>
-            <a:r>
-              <a:rPr lang="en-US" altLang="ja-JP" sz="4800" spc="-300" dirty="0">
-                <a:solidFill>
-                  <a:schemeClr val="tx1">
-                    <a:lumMod val="65000"/>
-                    <a:lumOff val="35000"/>
-                  </a:schemeClr>
-                </a:solidFill>
-                <a:latin typeface="HGP明朝E" panose="02020900000000000000" pitchFamily="18" charset="-128"/>
-                <a:ea typeface="HGP明朝E" panose="02020900000000000000" pitchFamily="18" charset="-128"/>
-              </a:rPr>
-              <a:t>/</a:t>
-            </a:r>
-            <a:endParaRPr kumimoji="1" lang="en-US" altLang="ja-JP" sz="4800" spc="-300" dirty="0">
-              <a:solidFill>
-                <a:schemeClr val="tx1">
-                  <a:lumMod val="65000"/>
-                  <a:lumOff val="35000"/>
-                </a:schemeClr>
-              </a:solidFill>
-              <a:latin typeface="HGP明朝E" panose="02020900000000000000" pitchFamily="18" charset="-128"/>
-              <a:ea typeface="HGP明朝E" panose="02020900000000000000" pitchFamily="18" charset="-128"/>
-            </a:endParaRPr>
-          </a:p>
-        </p:txBody>
-      </p:sp>
-      <p:sp>
-        <p:nvSpPr>
           <p:cNvPr id="10" name="テキスト ボックス 9">
             <a:extLst>
               <a:ext uri="{FF2B5EF4-FFF2-40B4-BE49-F238E27FC236}">
@@ -4013,7 +5872,7 @@
         </p:nvGrpSpPr>
         <p:grpSpPr>
           <a:xfrm>
-            <a:off x="10319202" y="1129389"/>
+            <a:off x="10178759" y="1087181"/>
             <a:ext cx="1002395" cy="1066463"/>
             <a:chOff x="6483802" y="4318000"/>
             <a:chExt cx="1002395" cy="1066463"/>
@@ -4194,10 +6053,1374 @@
           </a:p>
         </p:txBody>
       </p:sp>
+      <p:grpSp>
+        <p:nvGrpSpPr>
+          <p:cNvPr id="17" name="グループ化 16">
+            <a:extLst>
+              <a:ext uri="{FF2B5EF4-FFF2-40B4-BE49-F238E27FC236}">
+                <a16:creationId xmlns:a16="http://schemas.microsoft.com/office/drawing/2014/main" id="{343D899F-FFCB-CD06-45AA-69857D02B268}"/>
+              </a:ext>
+            </a:extLst>
+          </p:cNvPr>
+          <p:cNvGrpSpPr/>
+          <p:nvPr/>
+        </p:nvGrpSpPr>
+        <p:grpSpPr>
+          <a:xfrm>
+            <a:off x="5803066" y="1247123"/>
+            <a:ext cx="2252363" cy="845509"/>
+            <a:chOff x="5803066" y="1247123"/>
+            <a:chExt cx="2252363" cy="845509"/>
+          </a:xfrm>
+        </p:grpSpPr>
+        <p:sp>
+          <p:nvSpPr>
+            <p:cNvPr id="8" name="テキスト ボックス 7">
+              <a:extLst>
+                <a:ext uri="{FF2B5EF4-FFF2-40B4-BE49-F238E27FC236}">
+                  <a16:creationId xmlns:a16="http://schemas.microsoft.com/office/drawing/2014/main" id="{F019535F-47F6-F17C-F172-1F0BB0205473}"/>
+                </a:ext>
+              </a:extLst>
+            </p:cNvPr>
+            <p:cNvSpPr txBox="1"/>
+            <p:nvPr/>
+          </p:nvSpPr>
+          <p:spPr>
+            <a:xfrm>
+              <a:off x="5803066" y="1247123"/>
+              <a:ext cx="2252363" cy="830997"/>
+            </a:xfrm>
+            <a:prstGeom prst="rect">
+              <a:avLst/>
+            </a:prstGeom>
+            <a:noFill/>
+          </p:spPr>
+          <p:txBody>
+            <a:bodyPr wrap="square" rtlCol="0">
+              <a:spAutoFit/>
+            </a:bodyPr>
+            <a:lstStyle/>
+            <a:p>
+              <a:r>
+                <a:rPr lang="en-US" altLang="ja-JP" sz="4800" spc="-300" dirty="0">
+                  <a:solidFill>
+                    <a:schemeClr val="tx1">
+                      <a:lumMod val="65000"/>
+                      <a:lumOff val="35000"/>
+                    </a:schemeClr>
+                  </a:solidFill>
+                  <a:latin typeface="HGP明朝E" panose="02020900000000000000" pitchFamily="18" charset="-128"/>
+                  <a:ea typeface="HGP明朝E" panose="02020900000000000000" pitchFamily="18" charset="-128"/>
+                </a:rPr>
+                <a:t>/j</a:t>
+              </a:r>
+              <a:endParaRPr kumimoji="1" lang="en-US" altLang="ja-JP" sz="4800" spc="-300" dirty="0">
+                <a:solidFill>
+                  <a:schemeClr val="tx1">
+                    <a:lumMod val="65000"/>
+                    <a:lumOff val="35000"/>
+                  </a:schemeClr>
+                </a:solidFill>
+                <a:latin typeface="HGP明朝E" panose="02020900000000000000" pitchFamily="18" charset="-128"/>
+                <a:ea typeface="HGP明朝E" panose="02020900000000000000" pitchFamily="18" charset="-128"/>
+              </a:endParaRPr>
+            </a:p>
+          </p:txBody>
+        </p:sp>
+        <p:sp>
+          <p:nvSpPr>
+            <p:cNvPr id="7" name="テキスト ボックス 6">
+              <a:extLst>
+                <a:ext uri="{FF2B5EF4-FFF2-40B4-BE49-F238E27FC236}">
+                  <a16:creationId xmlns:a16="http://schemas.microsoft.com/office/drawing/2014/main" id="{4B167AB2-B618-85F8-011A-B2F3E8442EDB}"/>
+                </a:ext>
+              </a:extLst>
+            </p:cNvPr>
+            <p:cNvSpPr txBox="1"/>
+            <p:nvPr/>
+          </p:nvSpPr>
+          <p:spPr>
+            <a:xfrm>
+              <a:off x="6643710" y="1261635"/>
+              <a:ext cx="575664" cy="830997"/>
+            </a:xfrm>
+            <a:prstGeom prst="rect">
+              <a:avLst/>
+            </a:prstGeom>
+            <a:noFill/>
+          </p:spPr>
+          <p:txBody>
+            <a:bodyPr wrap="square" rtlCol="0">
+              <a:spAutoFit/>
+            </a:bodyPr>
+            <a:lstStyle/>
+            <a:p>
+              <a:r>
+                <a:rPr lang="en-US" altLang="ja-JP" sz="4800" spc="-300" dirty="0">
+                  <a:solidFill>
+                    <a:schemeClr val="tx1">
+                      <a:lumMod val="65000"/>
+                      <a:lumOff val="35000"/>
+                    </a:schemeClr>
+                  </a:solidFill>
+                  <a:latin typeface="HGP明朝E" panose="02020900000000000000" pitchFamily="18" charset="-128"/>
+                  <a:ea typeface="HGP明朝E" panose="02020900000000000000" pitchFamily="18" charset="-128"/>
+                </a:rPr>
+                <a:t>s</a:t>
+              </a:r>
+              <a:endParaRPr kumimoji="1" lang="en-US" altLang="ja-JP" sz="4800" spc="-300" dirty="0">
+                <a:solidFill>
+                  <a:schemeClr val="tx1">
+                    <a:lumMod val="65000"/>
+                    <a:lumOff val="35000"/>
+                  </a:schemeClr>
+                </a:solidFill>
+                <a:latin typeface="HGP明朝E" panose="02020900000000000000" pitchFamily="18" charset="-128"/>
+                <a:ea typeface="HGP明朝E" panose="02020900000000000000" pitchFamily="18" charset="-128"/>
+              </a:endParaRPr>
+            </a:p>
+          </p:txBody>
+        </p:sp>
+        <p:sp>
+          <p:nvSpPr>
+            <p:cNvPr id="9" name="テキスト ボックス 8">
+              <a:extLst>
+                <a:ext uri="{FF2B5EF4-FFF2-40B4-BE49-F238E27FC236}">
+                  <a16:creationId xmlns:a16="http://schemas.microsoft.com/office/drawing/2014/main" id="{30359DBA-3B4A-C5A0-56AB-35245C5CA9FD}"/>
+                </a:ext>
+              </a:extLst>
+            </p:cNvPr>
+            <p:cNvSpPr txBox="1"/>
+            <p:nvPr/>
+          </p:nvSpPr>
+          <p:spPr>
+            <a:xfrm>
+              <a:off x="7231724" y="1247124"/>
+              <a:ext cx="698500" cy="830997"/>
+            </a:xfrm>
+            <a:prstGeom prst="rect">
+              <a:avLst/>
+            </a:prstGeom>
+            <a:noFill/>
+          </p:spPr>
+          <p:txBody>
+            <a:bodyPr wrap="square" rtlCol="0">
+              <a:spAutoFit/>
+            </a:bodyPr>
+            <a:lstStyle/>
+            <a:p>
+              <a:r>
+                <a:rPr lang="en-US" altLang="ja-JP" sz="4800" spc="-300" dirty="0">
+                  <a:solidFill>
+                    <a:schemeClr val="tx1">
+                      <a:lumMod val="65000"/>
+                      <a:lumOff val="35000"/>
+                    </a:schemeClr>
+                  </a:solidFill>
+                  <a:latin typeface="HGP明朝E" panose="02020900000000000000" pitchFamily="18" charset="-128"/>
+                  <a:ea typeface="HGP明朝E" panose="02020900000000000000" pitchFamily="18" charset="-128"/>
+                </a:rPr>
+                <a:t>ò</a:t>
+              </a:r>
+              <a:endParaRPr kumimoji="1" lang="en-US" altLang="ja-JP" sz="4800" spc="-300" dirty="0">
+                <a:solidFill>
+                  <a:schemeClr val="tx1">
+                    <a:lumMod val="65000"/>
+                    <a:lumOff val="35000"/>
+                  </a:schemeClr>
+                </a:solidFill>
+                <a:latin typeface="HGP明朝E" panose="02020900000000000000" pitchFamily="18" charset="-128"/>
+                <a:ea typeface="HGP明朝E" panose="02020900000000000000" pitchFamily="18" charset="-128"/>
+              </a:endParaRPr>
+            </a:p>
+          </p:txBody>
+        </p:sp>
+        <p:sp>
+          <p:nvSpPr>
+            <p:cNvPr id="15" name="テキスト ボックス 14">
+              <a:extLst>
+                <a:ext uri="{FF2B5EF4-FFF2-40B4-BE49-F238E27FC236}">
+                  <a16:creationId xmlns:a16="http://schemas.microsoft.com/office/drawing/2014/main" id="{AAF3BD6C-8B36-D06B-204D-CA55A01632D3}"/>
+                </a:ext>
+              </a:extLst>
+            </p:cNvPr>
+            <p:cNvSpPr txBox="1"/>
+            <p:nvPr/>
+          </p:nvSpPr>
+          <p:spPr>
+            <a:xfrm>
+              <a:off x="6181808" y="1247123"/>
+              <a:ext cx="698500" cy="830997"/>
+            </a:xfrm>
+            <a:prstGeom prst="rect">
+              <a:avLst/>
+            </a:prstGeom>
+            <a:noFill/>
+          </p:spPr>
+          <p:txBody>
+            <a:bodyPr wrap="square" rtlCol="0">
+              <a:spAutoFit/>
+            </a:bodyPr>
+            <a:lstStyle/>
+            <a:p>
+              <a:r>
+                <a:rPr lang="en-US" altLang="ja-JP" sz="4800" spc="-300" dirty="0">
+                  <a:solidFill>
+                    <a:schemeClr val="tx1">
+                      <a:lumMod val="65000"/>
+                      <a:lumOff val="35000"/>
+                    </a:schemeClr>
+                  </a:solidFill>
+                  <a:latin typeface="HGP明朝E" panose="02020900000000000000" pitchFamily="18" charset="-128"/>
+                  <a:ea typeface="HGP明朝E" panose="02020900000000000000" pitchFamily="18" charset="-128"/>
+                </a:rPr>
+                <a:t>í</a:t>
+              </a:r>
+              <a:endParaRPr kumimoji="1" lang="en-US" altLang="ja-JP" sz="4800" spc="-300" dirty="0">
+                <a:solidFill>
+                  <a:schemeClr val="tx1">
+                    <a:lumMod val="65000"/>
+                    <a:lumOff val="35000"/>
+                  </a:schemeClr>
+                </a:solidFill>
+                <a:latin typeface="HGP明朝E" panose="02020900000000000000" pitchFamily="18" charset="-128"/>
+                <a:ea typeface="HGP明朝E" panose="02020900000000000000" pitchFamily="18" charset="-128"/>
+              </a:endParaRPr>
+            </a:p>
+          </p:txBody>
+        </p:sp>
+        <p:sp>
+          <p:nvSpPr>
+            <p:cNvPr id="16" name="テキスト ボックス 15">
+              <a:extLst>
+                <a:ext uri="{FF2B5EF4-FFF2-40B4-BE49-F238E27FC236}">
+                  <a16:creationId xmlns:a16="http://schemas.microsoft.com/office/drawing/2014/main" id="{CC20B4E8-80D8-50FC-D456-9A9D9D69D924}"/>
+                </a:ext>
+              </a:extLst>
+            </p:cNvPr>
+            <p:cNvSpPr txBox="1"/>
+            <p:nvPr/>
+          </p:nvSpPr>
+          <p:spPr>
+            <a:xfrm>
+              <a:off x="6982775" y="1261635"/>
+              <a:ext cx="698500" cy="830997"/>
+            </a:xfrm>
+            <a:prstGeom prst="rect">
+              <a:avLst/>
+            </a:prstGeom>
+            <a:noFill/>
+          </p:spPr>
+          <p:txBody>
+            <a:bodyPr wrap="square" rtlCol="0">
+              <a:spAutoFit/>
+            </a:bodyPr>
+            <a:lstStyle/>
+            <a:p>
+              <a:r>
+                <a:rPr kumimoji="1" lang="en-US" altLang="ja-JP" sz="4800" spc="-300" dirty="0">
+                  <a:solidFill>
+                    <a:schemeClr val="tx1">
+                      <a:lumMod val="65000"/>
+                      <a:lumOff val="35000"/>
+                    </a:schemeClr>
+                  </a:solidFill>
+                  <a:latin typeface="HGP明朝E" panose="02020900000000000000" pitchFamily="18" charset="-128"/>
+                  <a:ea typeface="HGP明朝E" panose="02020900000000000000" pitchFamily="18" charset="-128"/>
+                </a:rPr>
+                <a:t>h</a:t>
+              </a:r>
+            </a:p>
+          </p:txBody>
+        </p:sp>
+      </p:grpSp>
+      <p:sp>
+        <p:nvSpPr>
+          <p:cNvPr id="19" name="テキスト ボックス 18">
+            <a:extLst>
+              <a:ext uri="{FF2B5EF4-FFF2-40B4-BE49-F238E27FC236}">
+                <a16:creationId xmlns:a16="http://schemas.microsoft.com/office/drawing/2014/main" id="{66871EC4-CAF9-52B7-D59A-850D78B1752E}"/>
+              </a:ext>
+            </a:extLst>
+          </p:cNvPr>
+          <p:cNvSpPr txBox="1"/>
+          <p:nvPr/>
+        </p:nvSpPr>
+        <p:spPr>
+          <a:xfrm>
+            <a:off x="7783742" y="1265830"/>
+            <a:ext cx="2252363" cy="830997"/>
+          </a:xfrm>
+          <a:prstGeom prst="rect">
+            <a:avLst/>
+          </a:prstGeom>
+          <a:noFill/>
+        </p:spPr>
+        <p:txBody>
+          <a:bodyPr wrap="square" rtlCol="0">
+            <a:spAutoFit/>
+          </a:bodyPr>
+          <a:lstStyle/>
+          <a:p>
+            <a:r>
+              <a:rPr lang="en-US" altLang="ja-JP" sz="4800" spc="-300" dirty="0">
+                <a:solidFill>
+                  <a:schemeClr val="tx1">
+                    <a:lumMod val="65000"/>
+                    <a:lumOff val="35000"/>
+                  </a:schemeClr>
+                </a:solidFill>
+                <a:latin typeface="HGP明朝E" panose="02020900000000000000" pitchFamily="18" charset="-128"/>
+                <a:ea typeface="HGP明朝E" panose="02020900000000000000" pitchFamily="18" charset="-128"/>
+              </a:rPr>
+              <a:t>j</a:t>
+            </a:r>
+            <a:endParaRPr kumimoji="1" lang="en-US" altLang="ja-JP" sz="4800" spc="-300" dirty="0">
+              <a:solidFill>
+                <a:schemeClr val="tx1">
+                  <a:lumMod val="65000"/>
+                  <a:lumOff val="35000"/>
+                </a:schemeClr>
+              </a:solidFill>
+              <a:latin typeface="HGP明朝E" panose="02020900000000000000" pitchFamily="18" charset="-128"/>
+              <a:ea typeface="HGP明朝E" panose="02020900000000000000" pitchFamily="18" charset="-128"/>
+            </a:endParaRPr>
+          </a:p>
+        </p:txBody>
+      </p:sp>
+      <p:sp>
+        <p:nvSpPr>
+          <p:cNvPr id="20" name="テキスト ボックス 19">
+            <a:extLst>
+              <a:ext uri="{FF2B5EF4-FFF2-40B4-BE49-F238E27FC236}">
+                <a16:creationId xmlns:a16="http://schemas.microsoft.com/office/drawing/2014/main" id="{ED43D946-74D3-AEEA-A621-CD1EFEA94E11}"/>
+              </a:ext>
+            </a:extLst>
+          </p:cNvPr>
+          <p:cNvSpPr txBox="1"/>
+          <p:nvPr/>
+        </p:nvSpPr>
+        <p:spPr>
+          <a:xfrm>
+            <a:off x="8337478" y="1246112"/>
+            <a:ext cx="575664" cy="830997"/>
+          </a:xfrm>
+          <a:prstGeom prst="rect">
+            <a:avLst/>
+          </a:prstGeom>
+          <a:noFill/>
+        </p:spPr>
+        <p:txBody>
+          <a:bodyPr wrap="square" rtlCol="0">
+            <a:spAutoFit/>
+          </a:bodyPr>
+          <a:lstStyle/>
+          <a:p>
+            <a:r>
+              <a:rPr lang="en-US" altLang="ja-JP" sz="4800" spc="-300" dirty="0">
+                <a:solidFill>
+                  <a:schemeClr val="tx1">
+                    <a:lumMod val="65000"/>
+                    <a:lumOff val="35000"/>
+                  </a:schemeClr>
+                </a:solidFill>
+                <a:latin typeface="HGP明朝E" panose="02020900000000000000" pitchFamily="18" charset="-128"/>
+                <a:ea typeface="HGP明朝E" panose="02020900000000000000" pitchFamily="18" charset="-128"/>
+              </a:rPr>
+              <a:t>s</a:t>
+            </a:r>
+            <a:endParaRPr kumimoji="1" lang="en-US" altLang="ja-JP" sz="4800" spc="-300" dirty="0">
+              <a:solidFill>
+                <a:schemeClr val="tx1">
+                  <a:lumMod val="65000"/>
+                  <a:lumOff val="35000"/>
+                </a:schemeClr>
+              </a:solidFill>
+              <a:latin typeface="HGP明朝E" panose="02020900000000000000" pitchFamily="18" charset="-128"/>
+              <a:ea typeface="HGP明朝E" panose="02020900000000000000" pitchFamily="18" charset="-128"/>
+            </a:endParaRPr>
+          </a:p>
+        </p:txBody>
+      </p:sp>
+      <p:sp>
+        <p:nvSpPr>
+          <p:cNvPr id="21" name="テキスト ボックス 20">
+            <a:extLst>
+              <a:ext uri="{FF2B5EF4-FFF2-40B4-BE49-F238E27FC236}">
+                <a16:creationId xmlns:a16="http://schemas.microsoft.com/office/drawing/2014/main" id="{AEC1DE0A-3505-E8DA-D994-B34E53CC1648}"/>
+              </a:ext>
+            </a:extLst>
+          </p:cNvPr>
+          <p:cNvSpPr txBox="1"/>
+          <p:nvPr/>
+        </p:nvSpPr>
+        <p:spPr>
+          <a:xfrm>
+            <a:off x="8925492" y="1231601"/>
+            <a:ext cx="1136696" cy="830997"/>
+          </a:xfrm>
+          <a:prstGeom prst="rect">
+            <a:avLst/>
+          </a:prstGeom>
+          <a:noFill/>
+        </p:spPr>
+        <p:txBody>
+          <a:bodyPr wrap="square" rtlCol="0">
+            <a:spAutoFit/>
+          </a:bodyPr>
+          <a:lstStyle/>
+          <a:p>
+            <a:r>
+              <a:rPr lang="en-US" altLang="ja-JP" sz="4800" spc="-300" dirty="0">
+                <a:solidFill>
+                  <a:schemeClr val="tx1">
+                    <a:lumMod val="65000"/>
+                    <a:lumOff val="35000"/>
+                  </a:schemeClr>
+                </a:solidFill>
+                <a:latin typeface="HGP明朝E" panose="02020900000000000000" pitchFamily="18" charset="-128"/>
+                <a:ea typeface="HGP明朝E" panose="02020900000000000000" pitchFamily="18" charset="-128"/>
+              </a:rPr>
+              <a:t>ò/</a:t>
+            </a:r>
+            <a:endParaRPr kumimoji="1" lang="en-US" altLang="ja-JP" sz="4800" spc="-300" dirty="0">
+              <a:solidFill>
+                <a:schemeClr val="tx1">
+                  <a:lumMod val="65000"/>
+                  <a:lumOff val="35000"/>
+                </a:schemeClr>
+              </a:solidFill>
+              <a:latin typeface="HGP明朝E" panose="02020900000000000000" pitchFamily="18" charset="-128"/>
+              <a:ea typeface="HGP明朝E" panose="02020900000000000000" pitchFamily="18" charset="-128"/>
+            </a:endParaRPr>
+          </a:p>
+        </p:txBody>
+      </p:sp>
+      <p:sp>
+        <p:nvSpPr>
+          <p:cNvPr id="22" name="テキスト ボックス 21">
+            <a:extLst>
+              <a:ext uri="{FF2B5EF4-FFF2-40B4-BE49-F238E27FC236}">
+                <a16:creationId xmlns:a16="http://schemas.microsoft.com/office/drawing/2014/main" id="{6A6D8786-3FF6-6CD4-99B2-D57200C408B7}"/>
+              </a:ext>
+            </a:extLst>
+          </p:cNvPr>
+          <p:cNvSpPr txBox="1"/>
+          <p:nvPr/>
+        </p:nvSpPr>
+        <p:spPr>
+          <a:xfrm>
+            <a:off x="7875576" y="1231600"/>
+            <a:ext cx="698500" cy="830997"/>
+          </a:xfrm>
+          <a:prstGeom prst="rect">
+            <a:avLst/>
+          </a:prstGeom>
+          <a:noFill/>
+        </p:spPr>
+        <p:txBody>
+          <a:bodyPr wrap="square" rtlCol="0">
+            <a:spAutoFit/>
+          </a:bodyPr>
+          <a:lstStyle/>
+          <a:p>
+            <a:r>
+              <a:rPr lang="en-US" altLang="ja-JP" sz="4800" spc="-300" dirty="0">
+                <a:solidFill>
+                  <a:schemeClr val="tx1">
+                    <a:lumMod val="65000"/>
+                    <a:lumOff val="35000"/>
+                  </a:schemeClr>
+                </a:solidFill>
+                <a:latin typeface="HGP明朝E" panose="02020900000000000000" pitchFamily="18" charset="-128"/>
+                <a:ea typeface="HGP明朝E" panose="02020900000000000000" pitchFamily="18" charset="-128"/>
+              </a:rPr>
+              <a:t>í</a:t>
+            </a:r>
+            <a:endParaRPr kumimoji="1" lang="en-US" altLang="ja-JP" sz="4800" spc="-300" dirty="0">
+              <a:solidFill>
+                <a:schemeClr val="tx1">
+                  <a:lumMod val="65000"/>
+                  <a:lumOff val="35000"/>
+                </a:schemeClr>
+              </a:solidFill>
+              <a:latin typeface="HGP明朝E" panose="02020900000000000000" pitchFamily="18" charset="-128"/>
+              <a:ea typeface="HGP明朝E" panose="02020900000000000000" pitchFamily="18" charset="-128"/>
+            </a:endParaRPr>
+          </a:p>
+        </p:txBody>
+      </p:sp>
+      <p:sp>
+        <p:nvSpPr>
+          <p:cNvPr id="23" name="テキスト ボックス 22">
+            <a:extLst>
+              <a:ext uri="{FF2B5EF4-FFF2-40B4-BE49-F238E27FC236}">
+                <a16:creationId xmlns:a16="http://schemas.microsoft.com/office/drawing/2014/main" id="{99AA77C4-6DB9-4603-2976-3FD6AC5FD17D}"/>
+              </a:ext>
+            </a:extLst>
+          </p:cNvPr>
+          <p:cNvSpPr txBox="1"/>
+          <p:nvPr/>
+        </p:nvSpPr>
+        <p:spPr>
+          <a:xfrm>
+            <a:off x="8676543" y="1246112"/>
+            <a:ext cx="698500" cy="830997"/>
+          </a:xfrm>
+          <a:prstGeom prst="rect">
+            <a:avLst/>
+          </a:prstGeom>
+          <a:noFill/>
+        </p:spPr>
+        <p:txBody>
+          <a:bodyPr wrap="square" rtlCol="0">
+            <a:spAutoFit/>
+          </a:bodyPr>
+          <a:lstStyle/>
+          <a:p>
+            <a:r>
+              <a:rPr kumimoji="1" lang="en-US" altLang="ja-JP" sz="4800" spc="-300" dirty="0">
+                <a:solidFill>
+                  <a:schemeClr val="tx1">
+                    <a:lumMod val="65000"/>
+                    <a:lumOff val="35000"/>
+                  </a:schemeClr>
+                </a:solidFill>
+                <a:latin typeface="HGP明朝E" panose="02020900000000000000" pitchFamily="18" charset="-128"/>
+                <a:ea typeface="HGP明朝E" panose="02020900000000000000" pitchFamily="18" charset="-128"/>
+              </a:rPr>
+              <a:t>h</a:t>
+            </a:r>
+          </a:p>
+        </p:txBody>
+      </p:sp>
     </p:spTree>
     <p:extLst>
       <p:ext uri="{BB962C8B-B14F-4D97-AF65-F5344CB8AC3E}">
         <p14:creationId xmlns:p14="http://schemas.microsoft.com/office/powerpoint/2010/main" val="3162335891"/>
+      </p:ext>
+    </p:extLst>
+  </p:cSld>
+  <p:clrMapOvr>
+    <a:masterClrMapping/>
+  </p:clrMapOvr>
+</p:sld>
+</file>
+
+<file path=ppt/slides/slide4.xml><?xml version="1.0" encoding="utf-8"?>
+<p:sld xmlns:a="http://schemas.openxmlformats.org/drawingml/2006/main" xmlns:r="http://schemas.openxmlformats.org/officeDocument/2006/relationships" xmlns:p="http://schemas.openxmlformats.org/presentationml/2006/main">
+  <p:cSld>
+    <p:spTree>
+      <p:nvGrpSpPr>
+        <p:cNvPr id="1" name=""/>
+        <p:cNvGrpSpPr/>
+        <p:nvPr/>
+      </p:nvGrpSpPr>
+      <p:grpSpPr>
+        <a:xfrm>
+          <a:off x="0" y="0"/>
+          <a:ext cx="0" cy="0"/>
+          <a:chOff x="0" y="0"/>
+          <a:chExt cx="0" cy="0"/>
+        </a:xfrm>
+      </p:grpSpPr>
+      <p:sp>
+        <p:nvSpPr>
+          <p:cNvPr id="24" name="テキスト ボックス 23">
+            <a:extLst>
+              <a:ext uri="{FF2B5EF4-FFF2-40B4-BE49-F238E27FC236}">
+                <a16:creationId xmlns:a16="http://schemas.microsoft.com/office/drawing/2014/main" id="{D5CF0A11-1A30-CA01-662B-867D53927992}"/>
+              </a:ext>
+            </a:extLst>
+          </p:cNvPr>
+          <p:cNvSpPr txBox="1"/>
+          <p:nvPr/>
+        </p:nvSpPr>
+        <p:spPr>
+          <a:xfrm>
+            <a:off x="2632541" y="450413"/>
+            <a:ext cx="8695101" cy="6217087"/>
+          </a:xfrm>
+          <a:prstGeom prst="rect">
+            <a:avLst/>
+          </a:prstGeom>
+          <a:noFill/>
+        </p:spPr>
+        <p:txBody>
+          <a:bodyPr wrap="square" rtlCol="0">
+            <a:spAutoFit/>
+          </a:bodyPr>
+          <a:lstStyle/>
+          <a:p>
+            <a:r>
+              <a:rPr lang="en-US" altLang="ja-JP" sz="19900" dirty="0" err="1">
+                <a:latin typeface="Noto Sans JP Black" panose="020B0200000000000000" pitchFamily="50" charset="-128"/>
+                <a:ea typeface="Noto Sans JP Black" panose="020B0200000000000000" pitchFamily="50" charset="-128"/>
+              </a:rPr>
+              <a:t>Jisho</a:t>
+            </a:r>
+            <a:r>
+              <a:rPr lang="en-US" altLang="ja-JP" sz="19900" dirty="0">
+                <a:latin typeface="Noto Sans JP Black" panose="020B0200000000000000" pitchFamily="50" charset="-128"/>
+                <a:ea typeface="Noto Sans JP Black" panose="020B0200000000000000" pitchFamily="50" charset="-128"/>
+              </a:rPr>
+              <a:t>?</a:t>
+            </a:r>
+          </a:p>
+          <a:p>
+            <a:r>
+              <a:rPr lang="en-US" altLang="ja-JP" sz="19900" dirty="0" err="1">
+                <a:latin typeface="Noto Sans JP Black" panose="020B0200000000000000" pitchFamily="50" charset="-128"/>
+                <a:ea typeface="Noto Sans JP Black" panose="020B0200000000000000" pitchFamily="50" charset="-128"/>
+              </a:rPr>
+              <a:t>J</a:t>
+            </a:r>
+            <a:r>
+              <a:rPr lang="en-US" altLang="ja-JP" sz="19900" dirty="0" err="1">
+                <a:solidFill>
+                  <a:srgbClr val="59C294"/>
+                </a:solidFill>
+                <a:latin typeface="Noto Sans JP Black" panose="020B0200000000000000" pitchFamily="50" charset="-128"/>
+                <a:ea typeface="Noto Sans JP Black" panose="020B0200000000000000" pitchFamily="50" charset="-128"/>
+              </a:rPr>
+              <a:t>is</a:t>
+            </a:r>
+            <a:r>
+              <a:rPr lang="en-US" altLang="ja-JP" sz="19900" dirty="0" err="1">
+                <a:latin typeface="Noto Sans JP Black" panose="020B0200000000000000" pitchFamily="50" charset="-128"/>
+                <a:ea typeface="Noto Sans JP Black" panose="020B0200000000000000" pitchFamily="50" charset="-128"/>
+              </a:rPr>
+              <a:t>ho</a:t>
+            </a:r>
+            <a:r>
+              <a:rPr lang="en-US" altLang="ja-JP" sz="19900" dirty="0">
+                <a:latin typeface="Noto Sans JP Black" panose="020B0200000000000000" pitchFamily="50" charset="-128"/>
+                <a:ea typeface="Noto Sans JP Black" panose="020B0200000000000000" pitchFamily="50" charset="-128"/>
+              </a:rPr>
+              <a:t>!</a:t>
+            </a:r>
+            <a:endParaRPr kumimoji="1" lang="en-US" altLang="ja-JP" sz="19900" dirty="0">
+              <a:latin typeface="Noto Sans JP Black" panose="020B0200000000000000" pitchFamily="50" charset="-128"/>
+              <a:ea typeface="Noto Sans JP Black" panose="020B0200000000000000" pitchFamily="50" charset="-128"/>
+            </a:endParaRPr>
+          </a:p>
+        </p:txBody>
+      </p:sp>
+      <p:sp>
+        <p:nvSpPr>
+          <p:cNvPr id="26" name="正方形/長方形 25">
+            <a:extLst>
+              <a:ext uri="{FF2B5EF4-FFF2-40B4-BE49-F238E27FC236}">
+                <a16:creationId xmlns:a16="http://schemas.microsoft.com/office/drawing/2014/main" id="{9190C499-86A0-CF91-A641-E8ECB40E75E2}"/>
+              </a:ext>
+            </a:extLst>
+          </p:cNvPr>
+          <p:cNvSpPr/>
+          <p:nvPr/>
+        </p:nvSpPr>
+        <p:spPr>
+          <a:xfrm rot="2459194">
+            <a:off x="8112129" y="2450809"/>
+            <a:ext cx="635832" cy="332234"/>
+          </a:xfrm>
+          <a:prstGeom prst="rect">
+            <a:avLst/>
+          </a:prstGeom>
+          <a:solidFill>
+            <a:schemeClr val="tx1"/>
+          </a:solidFill>
+          <a:ln>
+            <a:solidFill>
+              <a:schemeClr val="tx1"/>
+            </a:solidFill>
+          </a:ln>
+        </p:spPr>
+        <p:style>
+          <a:lnRef idx="2">
+            <a:schemeClr val="accent1">
+              <a:shade val="15000"/>
+            </a:schemeClr>
+          </a:lnRef>
+          <a:fillRef idx="1">
+            <a:schemeClr val="accent1"/>
+          </a:fillRef>
+          <a:effectRef idx="0">
+            <a:schemeClr val="accent1"/>
+          </a:effectRef>
+          <a:fontRef idx="minor">
+            <a:schemeClr val="lt1"/>
+          </a:fontRef>
+        </p:style>
+        <p:txBody>
+          <a:bodyPr rtlCol="0" anchor="ctr"/>
+          <a:lstStyle/>
+          <a:p>
+            <a:pPr algn="ctr"/>
+            <a:endParaRPr kumimoji="1" lang="ja-JP" altLang="en-US"/>
+          </a:p>
+        </p:txBody>
+      </p:sp>
+    </p:spTree>
+    <p:extLst>
+      <p:ext uri="{BB962C8B-B14F-4D97-AF65-F5344CB8AC3E}">
+        <p14:creationId xmlns:p14="http://schemas.microsoft.com/office/powerpoint/2010/main" val="3765744334"/>
+      </p:ext>
+    </p:extLst>
+  </p:cSld>
+  <p:clrMapOvr>
+    <a:masterClrMapping/>
+  </p:clrMapOvr>
+</p:sld>
+</file>
+
+<file path=ppt/slides/slide5.xml><?xml version="1.0" encoding="utf-8"?>
+<p:sld xmlns:a="http://schemas.openxmlformats.org/drawingml/2006/main" xmlns:r="http://schemas.openxmlformats.org/officeDocument/2006/relationships" xmlns:p="http://schemas.openxmlformats.org/presentationml/2006/main">
+  <p:cSld>
+    <p:spTree>
+      <p:nvGrpSpPr>
+        <p:cNvPr id="1" name=""/>
+        <p:cNvGrpSpPr/>
+        <p:nvPr/>
+      </p:nvGrpSpPr>
+      <p:grpSpPr>
+        <a:xfrm>
+          <a:off x="0" y="0"/>
+          <a:ext cx="0" cy="0"/>
+          <a:chOff x="0" y="0"/>
+          <a:chExt cx="0" cy="0"/>
+        </a:xfrm>
+      </p:grpSpPr>
+      <p:sp>
+        <p:nvSpPr>
+          <p:cNvPr id="3" name="テキスト ボックス 2">
+            <a:extLst>
+              <a:ext uri="{FF2B5EF4-FFF2-40B4-BE49-F238E27FC236}">
+                <a16:creationId xmlns:a16="http://schemas.microsoft.com/office/drawing/2014/main" id="{CE2D6A1F-2232-3D52-C073-FBF1F0FB7C65}"/>
+              </a:ext>
+            </a:extLst>
+          </p:cNvPr>
+          <p:cNvSpPr txBox="1"/>
+          <p:nvPr/>
+        </p:nvSpPr>
+        <p:spPr>
+          <a:xfrm>
+            <a:off x="578853" y="3374514"/>
+            <a:ext cx="6327373" cy="2215991"/>
+          </a:xfrm>
+          <a:prstGeom prst="rect">
+            <a:avLst/>
+          </a:prstGeom>
+          <a:noFill/>
+        </p:spPr>
+        <p:txBody>
+          <a:bodyPr wrap="none" rtlCol="0">
+            <a:spAutoFit/>
+          </a:bodyPr>
+          <a:lstStyle/>
+          <a:p>
+            <a:r>
+              <a:rPr kumimoji="1" lang="en-US" altLang="ja-JP" sz="13800" dirty="0">
+                <a:solidFill>
+                  <a:schemeClr val="tx2"/>
+                </a:solidFill>
+                <a:latin typeface="GauFontDonutShop" panose="00000400000000000000" pitchFamily="2" charset="0"/>
+              </a:rPr>
+              <a:t>Dd)Dd)</a:t>
+            </a:r>
+            <a:endParaRPr kumimoji="1" lang="ja-JP" altLang="en-US" sz="13800" dirty="0">
+              <a:solidFill>
+                <a:schemeClr val="tx2"/>
+              </a:solidFill>
+              <a:latin typeface="GauFontDonutShop" panose="00000400000000000000" pitchFamily="2" charset="0"/>
+            </a:endParaRPr>
+          </a:p>
+        </p:txBody>
+      </p:sp>
+      <p:sp>
+        <p:nvSpPr>
+          <p:cNvPr id="2" name="テキスト ボックス 1">
+            <a:extLst>
+              <a:ext uri="{FF2B5EF4-FFF2-40B4-BE49-F238E27FC236}">
+                <a16:creationId xmlns:a16="http://schemas.microsoft.com/office/drawing/2014/main" id="{FBDCC2A8-2E43-91A0-6C3B-8FF71F524E0A}"/>
+              </a:ext>
+            </a:extLst>
+          </p:cNvPr>
+          <p:cNvSpPr txBox="1"/>
+          <p:nvPr/>
+        </p:nvSpPr>
+        <p:spPr>
+          <a:xfrm>
+            <a:off x="505111" y="3295854"/>
+            <a:ext cx="6327373" cy="2215991"/>
+          </a:xfrm>
+          <a:prstGeom prst="rect">
+            <a:avLst/>
+          </a:prstGeom>
+          <a:noFill/>
+        </p:spPr>
+        <p:txBody>
+          <a:bodyPr wrap="none" rtlCol="0">
+            <a:spAutoFit/>
+          </a:bodyPr>
+          <a:lstStyle/>
+          <a:p>
+            <a:r>
+              <a:rPr kumimoji="1" lang="en-US" altLang="ja-JP" sz="13800" dirty="0">
+                <a:solidFill>
+                  <a:srgbClr val="59C294"/>
+                </a:solidFill>
+                <a:latin typeface="GauFontDonutShop" panose="00000400000000000000" pitchFamily="2" charset="0"/>
+              </a:rPr>
+              <a:t>Dd)Dd)</a:t>
+            </a:r>
+            <a:endParaRPr kumimoji="1" lang="ja-JP" altLang="en-US" sz="13800" dirty="0">
+              <a:solidFill>
+                <a:srgbClr val="59C294"/>
+              </a:solidFill>
+              <a:latin typeface="GauFontDonutShop" panose="00000400000000000000" pitchFamily="2" charset="0"/>
+            </a:endParaRPr>
+          </a:p>
+        </p:txBody>
+      </p:sp>
+      <p:sp>
+        <p:nvSpPr>
+          <p:cNvPr id="4" name="テキスト ボックス 3">
+            <a:extLst>
+              <a:ext uri="{FF2B5EF4-FFF2-40B4-BE49-F238E27FC236}">
+                <a16:creationId xmlns:a16="http://schemas.microsoft.com/office/drawing/2014/main" id="{B959817A-1485-716F-AFE4-1348744CAC24}"/>
+              </a:ext>
+            </a:extLst>
+          </p:cNvPr>
+          <p:cNvSpPr txBox="1"/>
+          <p:nvPr/>
+        </p:nvSpPr>
+        <p:spPr>
+          <a:xfrm>
+            <a:off x="6376220" y="3080411"/>
+            <a:ext cx="4857135" cy="2646878"/>
+          </a:xfrm>
+          <a:prstGeom prst="rect">
+            <a:avLst/>
+          </a:prstGeom>
+          <a:noFill/>
+        </p:spPr>
+        <p:txBody>
+          <a:bodyPr wrap="square" rtlCol="0">
+            <a:spAutoFit/>
+          </a:bodyPr>
+          <a:lstStyle/>
+          <a:p>
+            <a:pPr algn="ctr"/>
+            <a:r>
+              <a:rPr kumimoji="1" lang="en-US" altLang="ja-JP" sz="16600" dirty="0" err="1">
+                <a:solidFill>
+                  <a:srgbClr val="59C294"/>
+                </a:solidFill>
+                <a:latin typeface="GauFontDonutShop" panose="00000400000000000000" pitchFamily="2" charset="0"/>
+              </a:rPr>
+              <a:t>heR</a:t>
+            </a:r>
+            <a:endParaRPr kumimoji="1" lang="ja-JP" altLang="en-US" sz="16600" dirty="0">
+              <a:solidFill>
+                <a:srgbClr val="59C294"/>
+              </a:solidFill>
+              <a:latin typeface="GauFontDonutShop" panose="00000400000000000000" pitchFamily="2" charset="0"/>
+            </a:endParaRPr>
+          </a:p>
+        </p:txBody>
+      </p:sp>
+      <p:sp>
+        <p:nvSpPr>
+          <p:cNvPr id="8" name="テキスト ボックス 7">
+            <a:extLst>
+              <a:ext uri="{FF2B5EF4-FFF2-40B4-BE49-F238E27FC236}">
+                <a16:creationId xmlns:a16="http://schemas.microsoft.com/office/drawing/2014/main" id="{690AF951-B902-23A0-C36A-0E4F7DE610F8}"/>
+              </a:ext>
+            </a:extLst>
+          </p:cNvPr>
+          <p:cNvSpPr txBox="1"/>
+          <p:nvPr/>
+        </p:nvSpPr>
+        <p:spPr>
+          <a:xfrm>
+            <a:off x="6302479" y="3102990"/>
+            <a:ext cx="4857135" cy="2646878"/>
+          </a:xfrm>
+          <a:prstGeom prst="rect">
+            <a:avLst/>
+          </a:prstGeom>
+          <a:noFill/>
+        </p:spPr>
+        <p:txBody>
+          <a:bodyPr wrap="square" rtlCol="0">
+            <a:spAutoFit/>
+          </a:bodyPr>
+          <a:lstStyle/>
+          <a:p>
+            <a:pPr algn="ctr"/>
+            <a:r>
+              <a:rPr kumimoji="1" lang="en-US" altLang="ja-JP" sz="16600" dirty="0" err="1">
+                <a:solidFill>
+                  <a:srgbClr val="002060"/>
+                </a:solidFill>
+                <a:latin typeface="GauFontDonutShop" panose="00000400000000000000" pitchFamily="2" charset="0"/>
+              </a:rPr>
+              <a:t>heR</a:t>
+            </a:r>
+            <a:endParaRPr kumimoji="1" lang="ja-JP" altLang="en-US" sz="16600" dirty="0">
+              <a:solidFill>
+                <a:srgbClr val="002060"/>
+              </a:solidFill>
+              <a:latin typeface="GauFontDonutShop" panose="00000400000000000000" pitchFamily="2" charset="0"/>
+            </a:endParaRPr>
+          </a:p>
+        </p:txBody>
+      </p:sp>
+    </p:spTree>
+    <p:extLst>
+      <p:ext uri="{BB962C8B-B14F-4D97-AF65-F5344CB8AC3E}">
+        <p14:creationId xmlns:p14="http://schemas.microsoft.com/office/powerpoint/2010/main" val="213405639"/>
+      </p:ext>
+    </p:extLst>
+  </p:cSld>
+  <p:clrMapOvr>
+    <a:masterClrMapping/>
+  </p:clrMapOvr>
+</p:sld>
+</file>
+
+<file path=ppt/slides/slide6.xml><?xml version="1.0" encoding="utf-8"?>
+<p:sld xmlns:a="http://schemas.openxmlformats.org/drawingml/2006/main" xmlns:r="http://schemas.openxmlformats.org/officeDocument/2006/relationships" xmlns:p="http://schemas.openxmlformats.org/presentationml/2006/main">
+  <p:cSld>
+    <p:bg>
+      <p:bgPr>
+        <a:solidFill>
+          <a:srgbClr val="6EB487"/>
+        </a:solidFill>
+        <a:effectLst/>
+      </p:bgPr>
+    </p:bg>
+    <p:spTree>
+      <p:nvGrpSpPr>
+        <p:cNvPr id="1" name=""/>
+        <p:cNvGrpSpPr/>
+        <p:nvPr/>
+      </p:nvGrpSpPr>
+      <p:grpSpPr>
+        <a:xfrm>
+          <a:off x="0" y="0"/>
+          <a:ext cx="0" cy="0"/>
+          <a:chOff x="0" y="0"/>
+          <a:chExt cx="0" cy="0"/>
+        </a:xfrm>
+      </p:grpSpPr>
+      <p:sp>
+        <p:nvSpPr>
+          <p:cNvPr id="7" name="テキスト ボックス 6">
+            <a:extLst>
+              <a:ext uri="{FF2B5EF4-FFF2-40B4-BE49-F238E27FC236}">
+                <a16:creationId xmlns:a16="http://schemas.microsoft.com/office/drawing/2014/main" id="{4CAFBA66-A65D-04E1-2420-0EF4750AA8D6}"/>
+              </a:ext>
+            </a:extLst>
+          </p:cNvPr>
+          <p:cNvSpPr txBox="1"/>
+          <p:nvPr/>
+        </p:nvSpPr>
+        <p:spPr>
+          <a:xfrm>
+            <a:off x="4167804" y="4858583"/>
+            <a:ext cx="4833257" cy="1569660"/>
+          </a:xfrm>
+          <a:prstGeom prst="rect">
+            <a:avLst/>
+          </a:prstGeom>
+          <a:noFill/>
+        </p:spPr>
+        <p:txBody>
+          <a:bodyPr wrap="square">
+            <a:spAutoFit/>
+          </a:bodyPr>
+          <a:lstStyle/>
+          <a:p>
+            <a:r>
+              <a:rPr lang="en-US" altLang="ja-JP" sz="9600" b="1" dirty="0">
+                <a:ln w="76200">
+                  <a:solidFill>
+                    <a:srgbClr val="81D4FA"/>
+                  </a:solidFill>
+                </a:ln>
+                <a:solidFill>
+                  <a:srgbClr val="81D4FA"/>
+                </a:solidFill>
+                <a:latin typeface="Noto Sans JP Black" panose="020B0200000000000000" pitchFamily="50" charset="-128"/>
+                <a:ea typeface="Noto Sans JP Black" panose="020B0200000000000000" pitchFamily="50" charset="-128"/>
+              </a:rPr>
+              <a:t>How To</a:t>
+            </a:r>
+            <a:endParaRPr lang="ja-JP" altLang="en-US" b="1" dirty="0">
+              <a:ln w="76200">
+                <a:solidFill>
+                  <a:srgbClr val="81D4FA"/>
+                </a:solidFill>
+              </a:ln>
+              <a:solidFill>
+                <a:srgbClr val="81D4FA"/>
+              </a:solidFill>
+            </a:endParaRPr>
+          </a:p>
+        </p:txBody>
+      </p:sp>
+      <p:sp>
+        <p:nvSpPr>
+          <p:cNvPr id="11" name="テキスト ボックス 10">
+            <a:extLst>
+              <a:ext uri="{FF2B5EF4-FFF2-40B4-BE49-F238E27FC236}">
+                <a16:creationId xmlns:a16="http://schemas.microsoft.com/office/drawing/2014/main" id="{EF00E3F9-579A-78C0-9534-193F44D8AC92}"/>
+              </a:ext>
+            </a:extLst>
+          </p:cNvPr>
+          <p:cNvSpPr txBox="1"/>
+          <p:nvPr/>
+        </p:nvSpPr>
+        <p:spPr>
+          <a:xfrm>
+            <a:off x="4600604" y="1865468"/>
+            <a:ext cx="4833257" cy="1569660"/>
+          </a:xfrm>
+          <a:prstGeom prst="rect">
+            <a:avLst/>
+          </a:prstGeom>
+          <a:noFill/>
+        </p:spPr>
+        <p:txBody>
+          <a:bodyPr wrap="square">
+            <a:spAutoFit/>
+          </a:bodyPr>
+          <a:lstStyle/>
+          <a:p>
+            <a:r>
+              <a:rPr lang="en-US" altLang="ja-JP" sz="9600" b="1" dirty="0">
+                <a:ln w="57150">
+                  <a:solidFill>
+                    <a:schemeClr val="bg1"/>
+                  </a:solidFill>
+                </a:ln>
+                <a:solidFill>
+                  <a:schemeClr val="bg1"/>
+                </a:solidFill>
+                <a:latin typeface="Noto Sans JP Black" panose="020B0200000000000000" pitchFamily="50" charset="-128"/>
+                <a:ea typeface="Noto Sans JP Black" panose="020B0200000000000000" pitchFamily="50" charset="-128"/>
+              </a:rPr>
+              <a:t>Choose</a:t>
+            </a:r>
+            <a:endParaRPr lang="ja-JP" altLang="en-US" b="1" dirty="0">
+              <a:ln w="57150">
+                <a:solidFill>
+                  <a:schemeClr val="bg1"/>
+                </a:solidFill>
+              </a:ln>
+              <a:solidFill>
+                <a:schemeClr val="bg1"/>
+              </a:solidFill>
+            </a:endParaRPr>
+          </a:p>
+        </p:txBody>
+      </p:sp>
+      <p:sp>
+        <p:nvSpPr>
+          <p:cNvPr id="6" name="テキスト ボックス 5">
+            <a:extLst>
+              <a:ext uri="{FF2B5EF4-FFF2-40B4-BE49-F238E27FC236}">
+                <a16:creationId xmlns:a16="http://schemas.microsoft.com/office/drawing/2014/main" id="{AC765B97-47B3-4C15-7DA4-107D5EBCD47A}"/>
+              </a:ext>
+            </a:extLst>
+          </p:cNvPr>
+          <p:cNvSpPr txBox="1"/>
+          <p:nvPr/>
+        </p:nvSpPr>
+        <p:spPr>
+          <a:xfrm>
+            <a:off x="4600604" y="1907060"/>
+            <a:ext cx="4833257" cy="1569660"/>
+          </a:xfrm>
+          <a:prstGeom prst="rect">
+            <a:avLst/>
+          </a:prstGeom>
+          <a:noFill/>
+        </p:spPr>
+        <p:txBody>
+          <a:bodyPr wrap="square">
+            <a:spAutoFit/>
+          </a:bodyPr>
+          <a:lstStyle/>
+          <a:p>
+            <a:r>
+              <a:rPr lang="en-US" altLang="ja-JP" sz="9600" b="1" dirty="0">
+                <a:ln w="57150">
+                  <a:solidFill>
+                    <a:srgbClr val="FFD54F"/>
+                  </a:solidFill>
+                </a:ln>
+                <a:solidFill>
+                  <a:srgbClr val="FFD54F"/>
+                </a:solidFill>
+                <a:latin typeface="Noto Sans JP Black" panose="020B0200000000000000" pitchFamily="50" charset="-128"/>
+                <a:ea typeface="Noto Sans JP Black" panose="020B0200000000000000" pitchFamily="50" charset="-128"/>
+              </a:rPr>
+              <a:t>Choose</a:t>
+            </a:r>
+            <a:endParaRPr lang="ja-JP" altLang="en-US" b="1" dirty="0">
+              <a:ln w="57150">
+                <a:solidFill>
+                  <a:srgbClr val="FFD54F"/>
+                </a:solidFill>
+              </a:ln>
+              <a:solidFill>
+                <a:srgbClr val="FFD54F"/>
+              </a:solidFill>
+            </a:endParaRPr>
+          </a:p>
+        </p:txBody>
+      </p:sp>
+      <p:sp>
+        <p:nvSpPr>
+          <p:cNvPr id="5" name="テキスト ボックス 4">
+            <a:extLst>
+              <a:ext uri="{FF2B5EF4-FFF2-40B4-BE49-F238E27FC236}">
+                <a16:creationId xmlns:a16="http://schemas.microsoft.com/office/drawing/2014/main" id="{DD4408AD-1929-BCEB-D4EC-417B226A4BC5}"/>
+              </a:ext>
+            </a:extLst>
+          </p:cNvPr>
+          <p:cNvSpPr txBox="1"/>
+          <p:nvPr/>
+        </p:nvSpPr>
+        <p:spPr>
+          <a:xfrm>
+            <a:off x="4600603" y="1950088"/>
+            <a:ext cx="4833257" cy="1569660"/>
+          </a:xfrm>
+          <a:prstGeom prst="rect">
+            <a:avLst/>
+          </a:prstGeom>
+          <a:noFill/>
+        </p:spPr>
+        <p:txBody>
+          <a:bodyPr wrap="square">
+            <a:spAutoFit/>
+          </a:bodyPr>
+          <a:lstStyle/>
+          <a:p>
+            <a:r>
+              <a:rPr lang="en-US" altLang="ja-JP" sz="9600" b="1" dirty="0">
+                <a:ln w="57150">
+                  <a:solidFill>
+                    <a:sysClr val="windowText" lastClr="000000"/>
+                  </a:solidFill>
+                </a:ln>
+                <a:latin typeface="Noto Sans JP Black" panose="020B0200000000000000" pitchFamily="50" charset="-128"/>
+                <a:ea typeface="Noto Sans JP Black" panose="020B0200000000000000" pitchFamily="50" charset="-128"/>
+              </a:rPr>
+              <a:t>Choose</a:t>
+            </a:r>
+            <a:endParaRPr lang="ja-JP" altLang="en-US" b="1" dirty="0">
+              <a:ln w="57150">
+                <a:solidFill>
+                  <a:sysClr val="windowText" lastClr="000000"/>
+                </a:solidFill>
+              </a:ln>
+            </a:endParaRPr>
+          </a:p>
+        </p:txBody>
+      </p:sp>
+      <p:sp>
+        <p:nvSpPr>
+          <p:cNvPr id="8" name="テキスト ボックス 7">
+            <a:extLst>
+              <a:ext uri="{FF2B5EF4-FFF2-40B4-BE49-F238E27FC236}">
+                <a16:creationId xmlns:a16="http://schemas.microsoft.com/office/drawing/2014/main" id="{7D4AA48F-054D-6374-DEC1-E8A73E2F2224}"/>
+              </a:ext>
+            </a:extLst>
+          </p:cNvPr>
+          <p:cNvSpPr txBox="1"/>
+          <p:nvPr/>
+        </p:nvSpPr>
+        <p:spPr>
+          <a:xfrm>
+            <a:off x="4167804" y="4858583"/>
+            <a:ext cx="4833257" cy="1569660"/>
+          </a:xfrm>
+          <a:prstGeom prst="rect">
+            <a:avLst/>
+          </a:prstGeom>
+          <a:noFill/>
+        </p:spPr>
+        <p:txBody>
+          <a:bodyPr wrap="square">
+            <a:spAutoFit/>
+          </a:bodyPr>
+          <a:lstStyle/>
+          <a:p>
+            <a:r>
+              <a:rPr lang="en-US" altLang="ja-JP" sz="9600" b="1" dirty="0">
+                <a:ln w="38100">
+                  <a:solidFill>
+                    <a:sysClr val="windowText" lastClr="000000"/>
+                  </a:solidFill>
+                </a:ln>
+                <a:latin typeface="Noto Sans JP Black" panose="020B0200000000000000" pitchFamily="50" charset="-128"/>
+                <a:ea typeface="Noto Sans JP Black" panose="020B0200000000000000" pitchFamily="50" charset="-128"/>
+              </a:rPr>
+              <a:t>How To</a:t>
+            </a:r>
+            <a:endParaRPr lang="ja-JP" altLang="en-US" b="1" dirty="0">
+              <a:ln w="38100">
+                <a:solidFill>
+                  <a:sysClr val="windowText" lastClr="000000"/>
+                </a:solidFill>
+              </a:ln>
+            </a:endParaRPr>
+          </a:p>
+        </p:txBody>
+      </p:sp>
+      <p:pic>
+        <p:nvPicPr>
+          <p:cNvPr id="14" name="図 13" descr="挿絵 が含まれている画像&#10;&#10;AI によって生成されたコンテンツは間違っている可能性があります。">
+            <a:extLst>
+              <a:ext uri="{FF2B5EF4-FFF2-40B4-BE49-F238E27FC236}">
+                <a16:creationId xmlns:a16="http://schemas.microsoft.com/office/drawing/2014/main" id="{8D609398-70AA-E659-E7B1-445E061F23CE}"/>
+              </a:ext>
+            </a:extLst>
+          </p:cNvPr>
+          <p:cNvPicPr>
+            <a:picLocks noChangeAspect="1"/>
+          </p:cNvPicPr>
+          <p:nvPr/>
+        </p:nvPicPr>
+        <p:blipFill>
+          <a:blip r:embed="rId2">
+            <a:extLst>
+              <a:ext uri="{28A0092B-C50C-407E-A947-70E740481C1C}">
+                <a14:useLocalDpi xmlns:a14="http://schemas.microsoft.com/office/drawing/2010/main" val="0"/>
+              </a:ext>
+            </a:extLst>
+          </a:blip>
+          <a:srcRect b="21015"/>
+          <a:stretch/>
+        </p:blipFill>
+        <p:spPr>
+          <a:xfrm>
+            <a:off x="858958" y="2358619"/>
+            <a:ext cx="4835283" cy="1306602"/>
+          </a:xfrm>
+          <a:prstGeom prst="rect">
+            <a:avLst/>
+          </a:prstGeom>
+        </p:spPr>
+      </p:pic>
+      <p:pic>
+        <p:nvPicPr>
+          <p:cNvPr id="16" name="図 15" descr="テキスト, ロゴ&#10;&#10;AI によって生成されたコンテンツは間違っている可能性があります。">
+            <a:extLst>
+              <a:ext uri="{FF2B5EF4-FFF2-40B4-BE49-F238E27FC236}">
+                <a16:creationId xmlns:a16="http://schemas.microsoft.com/office/drawing/2014/main" id="{0374AAA4-1A6D-9994-9C2B-698806AD1320}"/>
+              </a:ext>
+            </a:extLst>
+          </p:cNvPr>
+          <p:cNvPicPr>
+            <a:picLocks noChangeAspect="1"/>
+          </p:cNvPicPr>
+          <p:nvPr/>
+        </p:nvPicPr>
+        <p:blipFill>
+          <a:blip r:embed="rId3">
+            <a:extLst>
+              <a:ext uri="{28A0092B-C50C-407E-A947-70E740481C1C}">
+                <a14:useLocalDpi xmlns:a14="http://schemas.microsoft.com/office/drawing/2010/main" val="0"/>
+              </a:ext>
+            </a:extLst>
+          </a:blip>
+          <a:srcRect b="22189"/>
+          <a:stretch/>
+        </p:blipFill>
+        <p:spPr>
+          <a:xfrm>
+            <a:off x="1257945" y="596794"/>
+            <a:ext cx="4840825" cy="1306601"/>
+          </a:xfrm>
+          <a:prstGeom prst="rect">
+            <a:avLst/>
+          </a:prstGeom>
+        </p:spPr>
+      </p:pic>
+    </p:spTree>
+    <p:extLst>
+      <p:ext uri="{BB962C8B-B14F-4D97-AF65-F5344CB8AC3E}">
+        <p14:creationId xmlns:p14="http://schemas.microsoft.com/office/powerpoint/2010/main" val="2633626476"/>
+      </p:ext>
+    </p:extLst>
+  </p:cSld>
+  <p:clrMapOvr>
+    <a:masterClrMapping/>
+  </p:clrMapOvr>
+</p:sld>
+</file>
+
+<file path=ppt/slides/slide7.xml><?xml version="1.0" encoding="utf-8"?>
+<p:sld xmlns:a="http://schemas.openxmlformats.org/drawingml/2006/main" xmlns:r="http://schemas.openxmlformats.org/officeDocument/2006/relationships" xmlns:p="http://schemas.openxmlformats.org/presentationml/2006/main">
+  <p:cSld>
+    <p:spTree>
+      <p:nvGrpSpPr>
+        <p:cNvPr id="1" name=""/>
+        <p:cNvGrpSpPr/>
+        <p:nvPr/>
+      </p:nvGrpSpPr>
+      <p:grpSpPr>
+        <a:xfrm>
+          <a:off x="0" y="0"/>
+          <a:ext cx="0" cy="0"/>
+          <a:chOff x="0" y="0"/>
+          <a:chExt cx="0" cy="0"/>
+        </a:xfrm>
+      </p:grpSpPr>
+      <p:pic>
+        <p:nvPicPr>
+          <p:cNvPr id="5" name="図 4" descr="ロゴ&#10;&#10;AI によって生成されたコンテンツは間違っている可能性があります。">
+            <a:extLst>
+              <a:ext uri="{FF2B5EF4-FFF2-40B4-BE49-F238E27FC236}">
+                <a16:creationId xmlns:a16="http://schemas.microsoft.com/office/drawing/2014/main" id="{276CAC82-5F16-69F2-575A-072B6FFA53A3}"/>
+              </a:ext>
+            </a:extLst>
+          </p:cNvPr>
+          <p:cNvPicPr>
+            <a:picLocks noChangeAspect="1"/>
+          </p:cNvPicPr>
+          <p:nvPr/>
+        </p:nvPicPr>
+        <p:blipFill>
+          <a:blip r:embed="rId2">
+            <a:extLst>
+              <a:ext uri="{28A0092B-C50C-407E-A947-70E740481C1C}">
+                <a14:useLocalDpi xmlns:a14="http://schemas.microsoft.com/office/drawing/2010/main" val="0"/>
+              </a:ext>
+            </a:extLst>
+          </a:blip>
+          <a:srcRect l="10889" t="5848" r="17160" b="18596"/>
+          <a:stretch/>
+        </p:blipFill>
+        <p:spPr>
+          <a:xfrm>
+            <a:off x="2791327" y="838199"/>
+            <a:ext cx="6994358" cy="5181601"/>
+          </a:xfrm>
+          <a:prstGeom prst="rect">
+            <a:avLst/>
+          </a:prstGeom>
+        </p:spPr>
+      </p:pic>
+    </p:spTree>
+    <p:extLst>
+      <p:ext uri="{BB962C8B-B14F-4D97-AF65-F5344CB8AC3E}">
+        <p14:creationId xmlns:p14="http://schemas.microsoft.com/office/powerpoint/2010/main" val="2450130682"/>
       </p:ext>
     </p:extLst>
   </p:cSld>
@@ -4520,4 +7743,319 @@
     </a:ext>
   </a:extLst>
 </a:theme>
+</file>
+
+<file path=ppt/theme/theme2.xml><?xml version="1.0" encoding="utf-8"?>
+<a:theme xmlns:a="http://schemas.openxmlformats.org/drawingml/2006/main" name="Office テーマ">
+  <a:themeElements>
+    <a:clrScheme name="Office">
+      <a:dk1>
+        <a:sysClr val="windowText" lastClr="000000"/>
+      </a:dk1>
+      <a:lt1>
+        <a:sysClr val="window" lastClr="FFFFFF"/>
+      </a:lt1>
+      <a:dk2>
+        <a:srgbClr val="0E2841"/>
+      </a:dk2>
+      <a:lt2>
+        <a:srgbClr val="E8E8E8"/>
+      </a:lt2>
+      <a:accent1>
+        <a:srgbClr val="156082"/>
+      </a:accent1>
+      <a:accent2>
+        <a:srgbClr val="E97132"/>
+      </a:accent2>
+      <a:accent3>
+        <a:srgbClr val="196B24"/>
+      </a:accent3>
+      <a:accent4>
+        <a:srgbClr val="0F9ED5"/>
+      </a:accent4>
+      <a:accent5>
+        <a:srgbClr val="A02B93"/>
+      </a:accent5>
+      <a:accent6>
+        <a:srgbClr val="4EA72E"/>
+      </a:accent6>
+      <a:hlink>
+        <a:srgbClr val="467886"/>
+      </a:hlink>
+      <a:folHlink>
+        <a:srgbClr val="96607D"/>
+      </a:folHlink>
+    </a:clrScheme>
+    <a:fontScheme name="Office">
+      <a:majorFont>
+        <a:latin typeface="游ゴシック Light" panose="02110004020202020204"/>
+        <a:ea typeface=""/>
+        <a:cs typeface=""/>
+        <a:font script="Jpan" typeface="游ゴシック Light"/>
+        <a:font script="Hang" typeface="맑은 고딕"/>
+        <a:font script="Hans" typeface="等线 Light"/>
+        <a:font script="Hant" typeface="新細明體"/>
+        <a:font script="Arab" typeface="Times New Roman"/>
+        <a:font script="Hebr" typeface="Times New Roman"/>
+        <a:font script="Thai" typeface="Angsana New"/>
+        <a:font script="Ethi" typeface="Nyala"/>
+        <a:font script="Beng" typeface="Vrinda"/>
+        <a:font script="Gujr" typeface="Shruti"/>
+        <a:font script="Khmr" typeface="MoolBoran"/>
+        <a:font script="Knda" typeface="Tunga"/>
+        <a:font script="Guru" typeface="Raavi"/>
+        <a:font script="Cans" typeface="Euphemia"/>
+        <a:font script="Cher" typeface="Plantagenet Cherokee"/>
+        <a:font script="Yiii" typeface="Microsoft Yi Baiti"/>
+        <a:font script="Tibt" typeface="Microsoft Himalaya"/>
+        <a:font script="Thaa" typeface="MV Boli"/>
+        <a:font script="Deva" typeface="Mangal"/>
+        <a:font script="Telu" typeface="Gautami"/>
+        <a:font script="Taml" typeface="Latha"/>
+        <a:font script="Syrc" typeface="Estrangelo Edessa"/>
+        <a:font script="Orya" typeface="Kalinga"/>
+        <a:font script="Mlym" typeface="Kartika"/>
+        <a:font script="Laoo" typeface="DokChampa"/>
+        <a:font script="Sinh" typeface="Iskoola Pota"/>
+        <a:font script="Mong" typeface="Mongolian Baiti"/>
+        <a:font script="Viet" typeface="Times New Roman"/>
+        <a:font script="Uigh" typeface="Microsoft Uighur"/>
+        <a:font script="Geor" typeface="Sylfaen"/>
+        <a:font script="Armn" typeface="Arial"/>
+        <a:font script="Bugi" typeface="Leelawadee UI"/>
+        <a:font script="Bopo" typeface="Microsoft JhengHei"/>
+        <a:font script="Java" typeface="Javanese Text"/>
+        <a:font script="Lisu" typeface="Segoe UI"/>
+        <a:font script="Mymr" typeface="Myanmar Text"/>
+        <a:font script="Nkoo" typeface="Ebrima"/>
+        <a:font script="Olck" typeface="Nirmala UI"/>
+        <a:font script="Osma" typeface="Ebrima"/>
+        <a:font script="Phag" typeface="Phagspa"/>
+        <a:font script="Syrn" typeface="Estrangelo Edessa"/>
+        <a:font script="Syrj" typeface="Estrangelo Edessa"/>
+        <a:font script="Syre" typeface="Estrangelo Edessa"/>
+        <a:font script="Sora" typeface="Nirmala UI"/>
+        <a:font script="Tale" typeface="Microsoft Tai Le"/>
+        <a:font script="Talu" typeface="Microsoft New Tai Lue"/>
+        <a:font script="Tfng" typeface="Ebrima"/>
+      </a:majorFont>
+      <a:minorFont>
+        <a:latin typeface="游ゴシック" panose="02110004020202020204"/>
+        <a:ea typeface=""/>
+        <a:cs typeface=""/>
+        <a:font script="Jpan" typeface="游ゴシック"/>
+        <a:font script="Hang" typeface="맑은 고딕"/>
+        <a:font script="Hans" typeface="等线"/>
+        <a:font script="Hant" typeface="新細明體"/>
+        <a:font script="Arab" typeface="Arial"/>
+        <a:font script="Hebr" typeface="Arial"/>
+        <a:font script="Thai" typeface="Cordia New"/>
+        <a:font script="Ethi" typeface="Nyala"/>
+        <a:font script="Beng" typeface="Vrinda"/>
+        <a:font script="Gujr" typeface="Shruti"/>
+        <a:font script="Khmr" typeface="DaunPenh"/>
+        <a:font script="Knda" typeface="Tunga"/>
+        <a:font script="Guru" typeface="Raavi"/>
+        <a:font script="Cans" typeface="Euphemia"/>
+        <a:font script="Cher" typeface="Plantagenet Cherokee"/>
+        <a:font script="Yiii" typeface="Microsoft Yi Baiti"/>
+        <a:font script="Tibt" typeface="Microsoft Himalaya"/>
+        <a:font script="Thaa" typeface="MV Boli"/>
+        <a:font script="Deva" typeface="Mangal"/>
+        <a:font script="Telu" typeface="Gautami"/>
+        <a:font script="Taml" typeface="Latha"/>
+        <a:font script="Syrc" typeface="Estrangelo Edessa"/>
+        <a:font script="Orya" typeface="Kalinga"/>
+        <a:font script="Mlym" typeface="Kartika"/>
+        <a:font script="Laoo" typeface="DokChampa"/>
+        <a:font script="Sinh" typeface="Iskoola Pota"/>
+        <a:font script="Mong" typeface="Mongolian Baiti"/>
+        <a:font script="Viet" typeface="Arial"/>
+        <a:font script="Uigh" typeface="Microsoft Uighur"/>
+        <a:font script="Geor" typeface="Sylfaen"/>
+        <a:font script="Armn" typeface="Arial"/>
+        <a:font script="Bugi" typeface="Leelawadee UI"/>
+        <a:font script="Bopo" typeface="Microsoft JhengHei"/>
+        <a:font script="Java" typeface="Javanese Text"/>
+        <a:font script="Lisu" typeface="Segoe UI"/>
+        <a:font script="Mymr" typeface="Myanmar Text"/>
+        <a:font script="Nkoo" typeface="Ebrima"/>
+        <a:font script="Olck" typeface="Nirmala UI"/>
+        <a:font script="Osma" typeface="Ebrima"/>
+        <a:font script="Phag" typeface="Phagspa"/>
+        <a:font script="Syrn" typeface="Estrangelo Edessa"/>
+        <a:font script="Syrj" typeface="Estrangelo Edessa"/>
+        <a:font script="Syre" typeface="Estrangelo Edessa"/>
+        <a:font script="Sora" typeface="Nirmala UI"/>
+        <a:font script="Tale" typeface="Microsoft Tai Le"/>
+        <a:font script="Talu" typeface="Microsoft New Tai Lue"/>
+        <a:font script="Tfng" typeface="Ebrima"/>
+      </a:minorFont>
+    </a:fontScheme>
+    <a:fmtScheme name="Office">
+      <a:fillStyleLst>
+        <a:solidFill>
+          <a:schemeClr val="phClr"/>
+        </a:solidFill>
+        <a:gradFill rotWithShape="1">
+          <a:gsLst>
+            <a:gs pos="0">
+              <a:schemeClr val="phClr">
+                <a:lumMod val="110000"/>
+                <a:satMod val="105000"/>
+                <a:tint val="67000"/>
+              </a:schemeClr>
+            </a:gs>
+            <a:gs pos="50000">
+              <a:schemeClr val="phClr">
+                <a:lumMod val="105000"/>
+                <a:satMod val="103000"/>
+                <a:tint val="73000"/>
+              </a:schemeClr>
+            </a:gs>
+            <a:gs pos="100000">
+              <a:schemeClr val="phClr">
+                <a:lumMod val="105000"/>
+                <a:satMod val="109000"/>
+                <a:tint val="81000"/>
+              </a:schemeClr>
+            </a:gs>
+          </a:gsLst>
+          <a:lin ang="5400000" scaled="0"/>
+        </a:gradFill>
+        <a:gradFill rotWithShape="1">
+          <a:gsLst>
+            <a:gs pos="0">
+              <a:schemeClr val="phClr">
+                <a:satMod val="103000"/>
+                <a:lumMod val="102000"/>
+                <a:tint val="94000"/>
+              </a:schemeClr>
+            </a:gs>
+            <a:gs pos="50000">
+              <a:schemeClr val="phClr">
+                <a:satMod val="110000"/>
+                <a:lumMod val="100000"/>
+                <a:shade val="100000"/>
+              </a:schemeClr>
+            </a:gs>
+            <a:gs pos="100000">
+              <a:schemeClr val="phClr">
+                <a:lumMod val="99000"/>
+                <a:satMod val="120000"/>
+                <a:shade val="78000"/>
+              </a:schemeClr>
+            </a:gs>
+          </a:gsLst>
+          <a:lin ang="5400000" scaled="0"/>
+        </a:gradFill>
+      </a:fillStyleLst>
+      <a:lnStyleLst>
+        <a:ln w="12700" cap="flat" cmpd="sng" algn="ctr">
+          <a:solidFill>
+            <a:schemeClr val="phClr"/>
+          </a:solidFill>
+          <a:prstDash val="solid"/>
+          <a:miter lim="800000"/>
+        </a:ln>
+        <a:ln w="19050" cap="flat" cmpd="sng" algn="ctr">
+          <a:solidFill>
+            <a:schemeClr val="phClr"/>
+          </a:solidFill>
+          <a:prstDash val="solid"/>
+          <a:miter lim="800000"/>
+        </a:ln>
+        <a:ln w="25400" cap="flat" cmpd="sng" algn="ctr">
+          <a:solidFill>
+            <a:schemeClr val="phClr"/>
+          </a:solidFill>
+          <a:prstDash val="solid"/>
+          <a:miter lim="800000"/>
+        </a:ln>
+      </a:lnStyleLst>
+      <a:effectStyleLst>
+        <a:effectStyle>
+          <a:effectLst/>
+        </a:effectStyle>
+        <a:effectStyle>
+          <a:effectLst/>
+        </a:effectStyle>
+        <a:effectStyle>
+          <a:effectLst>
+            <a:outerShdw blurRad="57150" dist="19050" dir="5400000" algn="ctr" rotWithShape="0">
+              <a:srgbClr val="000000">
+                <a:alpha val="63000"/>
+              </a:srgbClr>
+            </a:outerShdw>
+          </a:effectLst>
+        </a:effectStyle>
+      </a:effectStyleLst>
+      <a:bgFillStyleLst>
+        <a:solidFill>
+          <a:schemeClr val="phClr"/>
+        </a:solidFill>
+        <a:solidFill>
+          <a:schemeClr val="phClr">
+            <a:tint val="95000"/>
+            <a:satMod val="170000"/>
+          </a:schemeClr>
+        </a:solidFill>
+        <a:gradFill rotWithShape="1">
+          <a:gsLst>
+            <a:gs pos="0">
+              <a:schemeClr val="phClr">
+                <a:tint val="93000"/>
+                <a:satMod val="150000"/>
+                <a:shade val="98000"/>
+                <a:lumMod val="102000"/>
+              </a:schemeClr>
+            </a:gs>
+            <a:gs pos="50000">
+              <a:schemeClr val="phClr">
+                <a:tint val="98000"/>
+                <a:satMod val="130000"/>
+                <a:shade val="90000"/>
+                <a:lumMod val="103000"/>
+              </a:schemeClr>
+            </a:gs>
+            <a:gs pos="100000">
+              <a:schemeClr val="phClr">
+                <a:shade val="63000"/>
+                <a:satMod val="120000"/>
+              </a:schemeClr>
+            </a:gs>
+          </a:gsLst>
+          <a:lin ang="5400000" scaled="0"/>
+        </a:gradFill>
+      </a:bgFillStyleLst>
+    </a:fmtScheme>
+  </a:themeElements>
+  <a:objectDefaults>
+    <a:lnDef>
+      <a:spPr/>
+      <a:bodyPr/>
+      <a:lstStyle/>
+      <a:style>
+        <a:lnRef idx="2">
+          <a:schemeClr val="accent1"/>
+        </a:lnRef>
+        <a:fillRef idx="0">
+          <a:schemeClr val="accent1"/>
+        </a:fillRef>
+        <a:effectRef idx="1">
+          <a:schemeClr val="accent1"/>
+        </a:effectRef>
+        <a:fontRef idx="minor">
+          <a:schemeClr val="tx1"/>
+        </a:fontRef>
+      </a:style>
+    </a:lnDef>
+  </a:objectDefaults>
+  <a:extraClrSchemeLst/>
+  <a:extLst>
+    <a:ext uri="{05A4C25C-085E-4340-85A3-A5531E510DB2}">
+      <thm15:themeFamily xmlns:thm15="http://schemas.microsoft.com/office/thememl/2012/main" name="Office Theme" id="{2E142A2C-CD16-42D6-873A-C26D2A0506FA}" vid="{1BDDFF52-6CD6-40A5-AB3C-68EB2F1E4D0A}"/>
+    </a:ext>
+  </a:extLst>
+</a:theme>
 </file>